--- a/dokumentumok/FixPont_bemutato.pptx
+++ b/dokumentumok/FixPont_bemutato.pptx
@@ -4,6 +4,9 @@
   <p:sldMasterIdLst>
     <p:sldMasterId id="2147483648" r:id="rId1"/>
   </p:sldMasterIdLst>
+  <p:notesMasterIdLst>
+    <p:notesMasterId r:id="rId12"/>
+  </p:notesMasterIdLst>
   <p:sldIdLst>
     <p:sldId id="256" r:id="rId2"/>
     <p:sldId id="257" r:id="rId3"/>
@@ -16,10 +19,7 @@
     <p:sldId id="264" r:id="rId10"/>
     <p:sldId id="265" r:id="rId11"/>
   </p:sldIdLst>
-  <p:notesMasterIdLst>
-    <p:notesMasterId r:id="rId12"/>
-  </p:notesMasterIdLst>
-  <p:sldSz cx="9144000" cy="5143500"/>
+  <p:sldSz cx="9144000" cy="5143500" type="screen16x9"/>
   <p:notesSz cx="5143500" cy="9144000"/>
   <p:defaultTextStyle>
     <a:lvl1pPr marL="0" algn="l" defTabSz="914400" rtl="0" eaLnBrk="1" latinLnBrk="0" hangingPunct="1">
@@ -116,12 +116,12 @@
   <p:extLst>
     <p:ext uri="{521415D9-36F7-43E2-AB2F-B90AF26B5E84}">
       <p14:sectionLst xmlns:p14="http://schemas.microsoft.com/office/powerpoint/2010/main">
-        <p14:section name="Bevezetés" id="{bdabc938-a05a-57c1-2d12-0619b6c31e38}">
+        <p14:section name="Bevezetés" id="{BDABC938-A05A-57C1-2D12-0619B6C31E38}">
           <p14:sldIdLst>
             <p14:sldId id="256"/>
           </p14:sldIdLst>
         </p14:section>
-        <p14:section name="Vállalkozás" id="{da9823b6-b3a3-2cd6-8961-5ad753910f88}">
+        <p14:section name="Vállalkozás" id="{DA9823B6-B3A3-2CD6-8961-5AD753910F88}">
           <p14:sldIdLst>
             <p14:sldId id="257"/>
             <p14:sldId id="258"/>
@@ -130,13 +130,13 @@
             <p14:sldId id="261"/>
           </p14:sldIdLst>
         </p14:section>
-        <p14:section name="Számok" id="{bf8dd174-8b1e-4369-df02-6bede083bdab}">
+        <p14:section name="Számok" id="{BF8DD174-8B1E-4369-DF02-6BEDE083BDAB}">
           <p14:sldIdLst>
             <p14:sldId id="262"/>
             <p14:sldId id="263"/>
           </p14:sldIdLst>
         </p14:section>
-        <p14:section name="Digitális jelenlét" id="{86e324d6-3549-5fe7-47db-69a084664e74}">
+        <p14:section name="Digitális jelenlét" id="{86E324D6-3549-5FE7-47DB-69A084664E74}">
           <p14:sldIdLst>
             <p14:sldId id="264"/>
             <p14:sldId id="265"/>
@@ -152,9 +152,11 @@
 </file>
 
 <file path=ppt/charts/chart1.xml><?xml version="1.0" encoding="utf-8"?>
-<c:chartSpace xmlns:c="http://schemas.openxmlformats.org/drawingml/2006/chart" xmlns:a="http://schemas.openxmlformats.org/drawingml/2006/main" xmlns:r="http://schemas.openxmlformats.org/officeDocument/2006/relationships">
+<c:chartSpace xmlns:c="http://schemas.openxmlformats.org/drawingml/2006/chart" xmlns:a="http://schemas.openxmlformats.org/drawingml/2006/main" xmlns:r="http://schemas.openxmlformats.org/officeDocument/2006/relationships" xmlns:c16r2="http://schemas.microsoft.com/office/drawing/2015/06/chart">
   <c:date1904 val="0"/>
+  <c:lang val="hu-HU"/>
   <c:roundedCorners val="1"/>
+  <c:style val="2"/>
   <c:chart>
     <c:title>
       <c:tx>
@@ -171,7 +173,7 @@
               </a:defRPr>
             </a:pPr>
             <a:r>
-              <a:rPr sz="1300" b="0" i="0" u="none" strike="noStrike">
+              <a:rPr lang="hu-HU" sz="1300" b="0" i="0" u="none" strike="noStrike">
                 <a:solidFill>
                   <a:srgbClr val="111827"/>
                 </a:solidFill>
@@ -182,7 +184,6 @@
           </a:p>
         </c:rich>
       </c:tx>
-      <c:layout/>
       <c:overlay val="0"/>
     </c:title>
     <c:autoTitleDeleted val="0"/>
@@ -213,75 +214,49 @@
             <a:effectLst/>
           </c:spPr>
           <c:invertIfNegative val="0"/>
-          <c:dLbls>
-            <c:numFmt formatCode="#,##0" sourceLinked="0"/>
-            <c:txPr>
-              <a:bodyPr/>
-              <a:lstStyle/>
-              <a:p>
-                <a:pPr>
-                  <a:defRPr b="0" i="0" strike="noStrike" sz="1200" u="none">
-                    <a:solidFill>
-                      <a:srgbClr val="000000"/>
-                    </a:solidFill>
-                    <a:latin typeface="Arial"/>
-                  </a:defRPr>
-                </a:pPr>
-              </a:p>
-            </c:txPr>
-            <c:showLegendKey val="0"/>
-            <c:showVal val="0"/>
-            <c:showCatName val="0"/>
-            <c:showSerName val="0"/>
-            <c:showPercent val="0"/>
-            <c:showBubbleSize val="0"/>
-            <c:showLeaderLines val="0"/>
-          </c:dLbls>
           <c:cat>
-            <c:multiLvlStrRef>
+            <c:strRef>
               <c:f>Sheet1!$A$2:$A$13</c:f>
-              <c:multiLvlStrCache>
+              <c:strCache>
                 <c:ptCount val="12"/>
-                <c:lvl>
-                  <c:pt idx="0">
-                    <c:v>Jan</c:v>
-                  </c:pt>
-                  <c:pt idx="1">
-                    <c:v>Feb</c:v>
-                  </c:pt>
-                  <c:pt idx="2">
-                    <c:v>Már</c:v>
-                  </c:pt>
-                  <c:pt idx="3">
-                    <c:v>Ápr</c:v>
-                  </c:pt>
-                  <c:pt idx="4">
-                    <c:v>Máj</c:v>
-                  </c:pt>
-                  <c:pt idx="5">
-                    <c:v>Jún</c:v>
-                  </c:pt>
-                  <c:pt idx="6">
-                    <c:v>Júl</c:v>
-                  </c:pt>
-                  <c:pt idx="7">
-                    <c:v>Aug</c:v>
-                  </c:pt>
-                  <c:pt idx="8">
-                    <c:v>Szep</c:v>
-                  </c:pt>
-                  <c:pt idx="9">
-                    <c:v>Okt</c:v>
-                  </c:pt>
-                  <c:pt idx="10">
-                    <c:v>Nov</c:v>
-                  </c:pt>
-                  <c:pt idx="11">
-                    <c:v>Dec</c:v>
-                  </c:pt>
-                </c:lvl>
-              </c:multiLvlStrCache>
-            </c:multiLvlStrRef>
+                <c:pt idx="0">
+                  <c:v>Jan</c:v>
+                </c:pt>
+                <c:pt idx="1">
+                  <c:v>Feb</c:v>
+                </c:pt>
+                <c:pt idx="2">
+                  <c:v>Már</c:v>
+                </c:pt>
+                <c:pt idx="3">
+                  <c:v>Ápr</c:v>
+                </c:pt>
+                <c:pt idx="4">
+                  <c:v>Máj</c:v>
+                </c:pt>
+                <c:pt idx="5">
+                  <c:v>Jún</c:v>
+                </c:pt>
+                <c:pt idx="6">
+                  <c:v>Júl</c:v>
+                </c:pt>
+                <c:pt idx="7">
+                  <c:v>Aug</c:v>
+                </c:pt>
+                <c:pt idx="8">
+                  <c:v>Szep</c:v>
+                </c:pt>
+                <c:pt idx="9">
+                  <c:v>Okt</c:v>
+                </c:pt>
+                <c:pt idx="10">
+                  <c:v>Nov</c:v>
+                </c:pt>
+                <c:pt idx="11">
+                  <c:v>Dec</c:v>
+                </c:pt>
+              </c:strCache>
+            </c:strRef>
           </c:cat>
           <c:val>
             <c:numRef>
@@ -323,11 +298,16 @@
                   <c:v>1.83</c:v>
                 </c:pt>
                 <c:pt idx="11">
-                  <c:v>2.05</c:v>
+                  <c:v>2.0499999999999998</c:v>
                 </c:pt>
               </c:numCache>
             </c:numRef>
           </c:val>
+          <c:extLst>
+            <c:ext xmlns:c16="http://schemas.microsoft.com/office/drawing/2014/chart" uri="{C3380CC4-5D6E-409C-BE32-E72D297353CC}">
+              <c16:uniqueId val="{00000000-F853-427D-9B5D-5FCA98AFE159}"/>
+            </c:ext>
+          </c:extLst>
         </c:ser>
         <c:ser>
           <c:idx val="1"/>
@@ -350,75 +330,49 @@
             <a:effectLst/>
           </c:spPr>
           <c:invertIfNegative val="0"/>
-          <c:dLbls>
-            <c:numFmt formatCode="#,##0" sourceLinked="0"/>
-            <c:txPr>
-              <a:bodyPr/>
-              <a:lstStyle/>
-              <a:p>
-                <a:pPr>
-                  <a:defRPr b="0" i="0" strike="noStrike" sz="1200" u="none">
-                    <a:solidFill>
-                      <a:srgbClr val="000000"/>
-                    </a:solidFill>
-                    <a:latin typeface="Arial"/>
-                  </a:defRPr>
-                </a:pPr>
-              </a:p>
-            </c:txPr>
-            <c:showLegendKey val="0"/>
-            <c:showVal val="0"/>
-            <c:showCatName val="0"/>
-            <c:showSerName val="0"/>
-            <c:showPercent val="0"/>
-            <c:showBubbleSize val="0"/>
-            <c:showLeaderLines val="0"/>
-          </c:dLbls>
           <c:cat>
-            <c:multiLvlStrRef>
+            <c:strRef>
               <c:f>Sheet1!$A$2:$A$13</c:f>
-              <c:multiLvlStrCache>
+              <c:strCache>
                 <c:ptCount val="12"/>
-                <c:lvl>
-                  <c:pt idx="0">
-                    <c:v>Jan</c:v>
-                  </c:pt>
-                  <c:pt idx="1">
-                    <c:v>Feb</c:v>
-                  </c:pt>
-                  <c:pt idx="2">
-                    <c:v>Már</c:v>
-                  </c:pt>
-                  <c:pt idx="3">
-                    <c:v>Ápr</c:v>
-                  </c:pt>
-                  <c:pt idx="4">
-                    <c:v>Máj</c:v>
-                  </c:pt>
-                  <c:pt idx="5">
-                    <c:v>Jún</c:v>
-                  </c:pt>
-                  <c:pt idx="6">
-                    <c:v>Júl</c:v>
-                  </c:pt>
-                  <c:pt idx="7">
-                    <c:v>Aug</c:v>
-                  </c:pt>
-                  <c:pt idx="8">
-                    <c:v>Szep</c:v>
-                  </c:pt>
-                  <c:pt idx="9">
-                    <c:v>Okt</c:v>
-                  </c:pt>
-                  <c:pt idx="10">
-                    <c:v>Nov</c:v>
-                  </c:pt>
-                  <c:pt idx="11">
-                    <c:v>Dec</c:v>
-                  </c:pt>
-                </c:lvl>
-              </c:multiLvlStrCache>
-            </c:multiLvlStrRef>
+                <c:pt idx="0">
+                  <c:v>Jan</c:v>
+                </c:pt>
+                <c:pt idx="1">
+                  <c:v>Feb</c:v>
+                </c:pt>
+                <c:pt idx="2">
+                  <c:v>Már</c:v>
+                </c:pt>
+                <c:pt idx="3">
+                  <c:v>Ápr</c:v>
+                </c:pt>
+                <c:pt idx="4">
+                  <c:v>Máj</c:v>
+                </c:pt>
+                <c:pt idx="5">
+                  <c:v>Jún</c:v>
+                </c:pt>
+                <c:pt idx="6">
+                  <c:v>Júl</c:v>
+                </c:pt>
+                <c:pt idx="7">
+                  <c:v>Aug</c:v>
+                </c:pt>
+                <c:pt idx="8">
+                  <c:v>Szep</c:v>
+                </c:pt>
+                <c:pt idx="9">
+                  <c:v>Okt</c:v>
+                </c:pt>
+                <c:pt idx="10">
+                  <c:v>Nov</c:v>
+                </c:pt>
+                <c:pt idx="11">
+                  <c:v>Dec</c:v>
+                </c:pt>
+              </c:strCache>
+            </c:strRef>
           </c:cat>
           <c:val>
             <c:numRef>
@@ -427,31 +381,31 @@
                 <c:formatCode>General</c:formatCode>
                 <c:ptCount val="12"/>
                 <c:pt idx="0">
-                  <c:v>1.059</c:v>
+                  <c:v>1.0589999999999999</c:v>
                 </c:pt>
                 <c:pt idx="1">
                   <c:v>1.077</c:v>
                 </c:pt>
                 <c:pt idx="2">
-                  <c:v>1.132</c:v>
+                  <c:v>1.1319999999999999</c:v>
                 </c:pt>
                 <c:pt idx="3">
-                  <c:v>1.11</c:v>
+                  <c:v>1.1100000000000001</c:v>
                 </c:pt>
                 <c:pt idx="4">
                   <c:v>1.159</c:v>
                 </c:pt>
                 <c:pt idx="5">
-                  <c:v>1.15</c:v>
+                  <c:v>1.1499999999999999</c:v>
                 </c:pt>
                 <c:pt idx="6">
                   <c:v>1.123</c:v>
                 </c:pt>
                 <c:pt idx="7">
-                  <c:v>1.174</c:v>
+                  <c:v>1.1739999999999999</c:v>
                 </c:pt>
                 <c:pt idx="8">
-                  <c:v>1.223</c:v>
+                  <c:v>1.2230000000000001</c:v>
                 </c:pt>
                 <c:pt idx="9">
                   <c:v>1.214</c:v>
@@ -465,36 +419,23 @@
               </c:numCache>
             </c:numRef>
           </c:val>
+          <c:extLst>
+            <c:ext xmlns:c16="http://schemas.microsoft.com/office/drawing/2014/chart" uri="{C3380CC4-5D6E-409C-BE32-E72D297353CC}">
+              <c16:uniqueId val="{00000001-F853-427D-9B5D-5FCA98AFE159}"/>
+            </c:ext>
+          </c:extLst>
         </c:ser>
         <c:dLbls>
-          <c:numFmt formatCode="#,##0" sourceLinked="0"/>
-          <c:txPr>
-            <a:bodyPr/>
-            <a:lstStyle/>
-            <a:p>
-              <a:pPr>
-                <a:defRPr b="0" i="0" strike="noStrike" sz="1200" u="none">
-                  <a:solidFill>
-                    <a:srgbClr val="000000"/>
-                  </a:solidFill>
-                  <a:latin typeface="Arial"/>
-                </a:defRPr>
-              </a:pPr>
-            </a:p>
-          </c:txPr>
           <c:showLegendKey val="0"/>
           <c:showVal val="0"/>
           <c:showCatName val="0"/>
           <c:showSerName val="0"/>
           <c:showPercent val="0"/>
           <c:showBubbleSize val="0"/>
-          <c:showLeaderLines val="0"/>
         </c:dLbls>
         <c:gapWidth val="50"/>
-        <c:overlap val="0"/>
         <c:axId val="2094734554"/>
         <c:axId val="2094734552"/>
-        <c:axId val="2094734556"/>
       </c:barChart>
       <c:catAx>
         <c:axId val="2094734554"/>
@@ -535,6 +476,7 @@
         <c:crosses val="autoZero"/>
         <c:auto val="1"/>
         <c:lblAlgn val="ctr"/>
+        <c:lblOffset val="100"/>
         <c:noMultiLvlLbl val="1"/>
       </c:catAx>
       <c:valAx>
@@ -620,6 +562,7 @@
     </c:legend>
     <c:plotVisOnly val="1"/>
     <c:dispBlanksAs val="span"/>
+    <c:showDLblsOverMax val="1"/>
   </c:chart>
   <c:spPr>
     <a:noFill/>
@@ -635,9 +578,11 @@
 </file>
 
 <file path=ppt/charts/chart2.xml><?xml version="1.0" encoding="utf-8"?>
-<c:chartSpace xmlns:c="http://schemas.openxmlformats.org/drawingml/2006/chart" xmlns:a="http://schemas.openxmlformats.org/drawingml/2006/main" xmlns:r="http://schemas.openxmlformats.org/officeDocument/2006/relationships">
+<c:chartSpace xmlns:c="http://schemas.openxmlformats.org/drawingml/2006/chart" xmlns:a="http://schemas.openxmlformats.org/drawingml/2006/main" xmlns:r="http://schemas.openxmlformats.org/officeDocument/2006/relationships" xmlns:c16r2="http://schemas.microsoft.com/office/drawing/2015/06/chart">
   <c:date1904 val="0"/>
+  <c:lang val="hu-HU"/>
   <c:roundedCorners val="1"/>
+  <c:style val="2"/>
   <c:chart>
     <c:title>
       <c:tx>
@@ -654,7 +599,7 @@
               </a:defRPr>
             </a:pPr>
             <a:r>
-              <a:rPr sz="1300" b="0" i="0" u="none" strike="noStrike">
+              <a:rPr lang="hu-HU" sz="1300" b="0" i="0" u="none" strike="noStrike">
                 <a:solidFill>
                   <a:srgbClr val="111827"/>
                 </a:solidFill>
@@ -665,7 +610,6 @@
           </a:p>
         </c:rich>
       </c:tx>
-      <c:layout/>
       <c:overlay val="0"/>
     </c:title>
     <c:autoTitleDeleted val="0"/>
@@ -709,6 +653,11 @@
               </a:solidFill>
               <a:effectLst/>
             </c:spPr>
+            <c:extLst>
+              <c:ext xmlns:c16="http://schemas.microsoft.com/office/drawing/2014/chart" uri="{C3380CC4-5D6E-409C-BE32-E72D297353CC}">
+                <c16:uniqueId val="{00000001-480E-458E-A264-8D5D1CC84588}"/>
+              </c:ext>
+            </c:extLst>
           </c:dPt>
           <c:dPt>
             <c:idx val="1"/>
@@ -719,6 +668,11 @@
               </a:solidFill>
               <a:effectLst/>
             </c:spPr>
+            <c:extLst>
+              <c:ext xmlns:c16="http://schemas.microsoft.com/office/drawing/2014/chart" uri="{C3380CC4-5D6E-409C-BE32-E72D297353CC}">
+                <c16:uniqueId val="{00000003-480E-458E-A264-8D5D1CC84588}"/>
+              </c:ext>
+            </c:extLst>
           </c:dPt>
           <c:dPt>
             <c:idx val="2"/>
@@ -729,6 +683,11 @@
               </a:solidFill>
               <a:effectLst/>
             </c:spPr>
+            <c:extLst>
+              <c:ext xmlns:c16="http://schemas.microsoft.com/office/drawing/2014/chart" uri="{C3380CC4-5D6E-409C-BE32-E72D297353CC}">
+                <c16:uniqueId val="{00000005-480E-458E-A264-8D5D1CC84588}"/>
+              </c:ext>
+            </c:extLst>
           </c:dPt>
           <c:dPt>
             <c:idx val="3"/>
@@ -739,6 +698,11 @@
               </a:solidFill>
               <a:effectLst/>
             </c:spPr>
+            <c:extLst>
+              <c:ext xmlns:c16="http://schemas.microsoft.com/office/drawing/2014/chart" uri="{C3380CC4-5D6E-409C-BE32-E72D297353CC}">
+                <c16:uniqueId val="{00000007-480E-458E-A264-8D5D1CC84588}"/>
+              </c:ext>
+            </c:extLst>
           </c:dPt>
           <c:dPt>
             <c:idx val="4"/>
@@ -749,6 +713,11 @@
               </a:solidFill>
               <a:effectLst/>
             </c:spPr>
+            <c:extLst>
+              <c:ext xmlns:c16="http://schemas.microsoft.com/office/drawing/2014/chart" uri="{C3380CC4-5D6E-409C-BE32-E72D297353CC}">
+                <c16:uniqueId val="{00000009-480E-458E-A264-8D5D1CC84588}"/>
+              </c:ext>
+            </c:extLst>
           </c:dPt>
           <c:dPt>
             <c:idx val="5"/>
@@ -759,6 +728,11 @@
               </a:solidFill>
               <a:effectLst/>
             </c:spPr>
+            <c:extLst>
+              <c:ext xmlns:c16="http://schemas.microsoft.com/office/drawing/2014/chart" uri="{C3380CC4-5D6E-409C-BE32-E72D297353CC}">
+                <c16:uniqueId val="{0000000B-480E-458E-A264-8D5D1CC84588}"/>
+              </c:ext>
+            </c:extLst>
           </c:dPt>
           <c:dLbls>
             <c:dLbl>
@@ -777,6 +751,7 @@
                       <a:latin typeface="+mn-lt"/>
                     </a:defRPr>
                   </a:pPr>
+                  <a:endParaRPr lang="hu-HU"/>
                 </a:p>
               </c:txPr>
               <c:showLegendKey val="0"/>
@@ -785,6 +760,12 @@
               <c:showSerName val="0"/>
               <c:showPercent val="1"/>
               <c:showBubbleSize val="0"/>
+              <c:extLst>
+                <c:ext xmlns:c15="http://schemas.microsoft.com/office/drawing/2012/chart" uri="{CE6537A1-D6FC-4f65-9D91-7224C49458BB}"/>
+                <c:ext xmlns:c16="http://schemas.microsoft.com/office/drawing/2014/chart" uri="{C3380CC4-5D6E-409C-BE32-E72D297353CC}">
+                  <c16:uniqueId val="{00000001-480E-458E-A264-8D5D1CC84588}"/>
+                </c:ext>
+              </c:extLst>
             </c:dLbl>
             <c:dLbl>
               <c:idx val="1"/>
@@ -802,6 +783,7 @@
                       <a:latin typeface="+mn-lt"/>
                     </a:defRPr>
                   </a:pPr>
+                  <a:endParaRPr lang="hu-HU"/>
                 </a:p>
               </c:txPr>
               <c:showLegendKey val="0"/>
@@ -810,6 +792,12 @@
               <c:showSerName val="0"/>
               <c:showPercent val="1"/>
               <c:showBubbleSize val="0"/>
+              <c:extLst>
+                <c:ext xmlns:c15="http://schemas.microsoft.com/office/drawing/2012/chart" uri="{CE6537A1-D6FC-4f65-9D91-7224C49458BB}"/>
+                <c:ext xmlns:c16="http://schemas.microsoft.com/office/drawing/2014/chart" uri="{C3380CC4-5D6E-409C-BE32-E72D297353CC}">
+                  <c16:uniqueId val="{00000003-480E-458E-A264-8D5D1CC84588}"/>
+                </c:ext>
+              </c:extLst>
             </c:dLbl>
             <c:dLbl>
               <c:idx val="2"/>
@@ -827,6 +815,7 @@
                       <a:latin typeface="+mn-lt"/>
                     </a:defRPr>
                   </a:pPr>
+                  <a:endParaRPr lang="hu-HU"/>
                 </a:p>
               </c:txPr>
               <c:showLegendKey val="0"/>
@@ -835,6 +824,12 @@
               <c:showSerName val="0"/>
               <c:showPercent val="1"/>
               <c:showBubbleSize val="0"/>
+              <c:extLst>
+                <c:ext xmlns:c15="http://schemas.microsoft.com/office/drawing/2012/chart" uri="{CE6537A1-D6FC-4f65-9D91-7224C49458BB}"/>
+                <c:ext xmlns:c16="http://schemas.microsoft.com/office/drawing/2014/chart" uri="{C3380CC4-5D6E-409C-BE32-E72D297353CC}">
+                  <c16:uniqueId val="{00000005-480E-458E-A264-8D5D1CC84588}"/>
+                </c:ext>
+              </c:extLst>
             </c:dLbl>
             <c:dLbl>
               <c:idx val="3"/>
@@ -852,6 +847,7 @@
                       <a:latin typeface="+mn-lt"/>
                     </a:defRPr>
                   </a:pPr>
+                  <a:endParaRPr lang="hu-HU"/>
                 </a:p>
               </c:txPr>
               <c:showLegendKey val="0"/>
@@ -860,6 +856,12 @@
               <c:showSerName val="0"/>
               <c:showPercent val="1"/>
               <c:showBubbleSize val="0"/>
+              <c:extLst>
+                <c:ext xmlns:c15="http://schemas.microsoft.com/office/drawing/2012/chart" uri="{CE6537A1-D6FC-4f65-9D91-7224C49458BB}"/>
+                <c:ext xmlns:c16="http://schemas.microsoft.com/office/drawing/2014/chart" uri="{C3380CC4-5D6E-409C-BE32-E72D297353CC}">
+                  <c16:uniqueId val="{00000007-480E-458E-A264-8D5D1CC84588}"/>
+                </c:ext>
+              </c:extLst>
             </c:dLbl>
             <c:dLbl>
               <c:idx val="4"/>
@@ -877,6 +879,7 @@
                       <a:latin typeface="+mn-lt"/>
                     </a:defRPr>
                   </a:pPr>
+                  <a:endParaRPr lang="hu-HU"/>
                 </a:p>
               </c:txPr>
               <c:showLegendKey val="0"/>
@@ -885,6 +888,12 @@
               <c:showSerName val="0"/>
               <c:showPercent val="1"/>
               <c:showBubbleSize val="0"/>
+              <c:extLst>
+                <c:ext xmlns:c15="http://schemas.microsoft.com/office/drawing/2012/chart" uri="{CE6537A1-D6FC-4f65-9D91-7224C49458BB}"/>
+                <c:ext xmlns:c16="http://schemas.microsoft.com/office/drawing/2014/chart" uri="{C3380CC4-5D6E-409C-BE32-E72D297353CC}">
+                  <c16:uniqueId val="{00000009-480E-458E-A264-8D5D1CC84588}"/>
+                </c:ext>
+              </c:extLst>
             </c:dLbl>
             <c:dLbl>
               <c:idx val="5"/>
@@ -902,6 +911,7 @@
                       <a:latin typeface="+mn-lt"/>
                     </a:defRPr>
                   </a:pPr>
+                  <a:endParaRPr lang="hu-HU"/>
                 </a:p>
               </c:txPr>
               <c:showLegendKey val="0"/>
@@ -910,8 +920,21 @@
               <c:showSerName val="0"/>
               <c:showPercent val="1"/>
               <c:showBubbleSize val="0"/>
+              <c:extLst>
+                <c:ext xmlns:c15="http://schemas.microsoft.com/office/drawing/2012/chart" uri="{CE6537A1-D6FC-4f65-9D91-7224C49458BB}"/>
+                <c:ext xmlns:c16="http://schemas.microsoft.com/office/drawing/2014/chart" uri="{C3380CC4-5D6E-409C-BE32-E72D297353CC}">
+                  <c16:uniqueId val="{0000000B-480E-458E-A264-8D5D1CC84588}"/>
+                </c:ext>
+              </c:extLst>
             </c:dLbl>
             <c:numFmt formatCode="0%" sourceLinked="0"/>
+            <c:spPr>
+              <a:noFill/>
+              <a:ln>
+                <a:noFill/>
+              </a:ln>
+              <a:effectLst/>
+            </c:spPr>
             <c:txPr>
               <a:bodyPr/>
               <a:lstStyle/>
@@ -924,6 +947,7 @@
                     <a:latin typeface="Arial"/>
                   </a:defRPr>
                 </a:pPr>
+                <a:endParaRPr lang="hu-HU"/>
               </a:p>
             </c:txPr>
             <c:showLegendKey val="0"/>
@@ -933,6 +957,9 @@
             <c:showPercent val="1"/>
             <c:showBubbleSize val="0"/>
             <c:showLeaderLines val="0"/>
+            <c:extLst>
+              <c:ext xmlns:c15="http://schemas.microsoft.com/office/drawing/2012/chart" uri="{CE6537A1-D6FC-4f65-9D91-7224C49458BB}"/>
+            </c:extLst>
           </c:dLbls>
           <c:cat>
             <c:strRef>
@@ -964,6 +991,7 @@
             <c:numRef>
               <c:f>Sheet1!$B$2:$B$7</c:f>
               <c:numCache>
+                <c:formatCode>General</c:formatCode>
                 <c:ptCount val="6"/>
                 <c:pt idx="0">
                   <c:v>5600000</c:v>
@@ -986,7 +1014,21 @@
               </c:numCache>
             </c:numRef>
           </c:val>
+          <c:extLst>
+            <c:ext xmlns:c16="http://schemas.microsoft.com/office/drawing/2014/chart" uri="{C3380CC4-5D6E-409C-BE32-E72D297353CC}">
+              <c16:uniqueId val="{0000000C-480E-458E-A264-8D5D1CC84588}"/>
+            </c:ext>
+          </c:extLst>
         </c:ser>
+        <c:dLbls>
+          <c:showLegendKey val="0"/>
+          <c:showVal val="0"/>
+          <c:showCatName val="0"/>
+          <c:showSerName val="0"/>
+          <c:showPercent val="0"/>
+          <c:showBubbleSize val="0"/>
+          <c:showLeaderLines val="0"/>
+        </c:dLbls>
         <c:firstSliceAng val="0"/>
         <c:holeSize val="55"/>
       </c:doughnutChart>
@@ -1020,6 +1062,7 @@
     </c:legend>
     <c:plotVisOnly val="1"/>
     <c:dispBlanksAs val="span"/>
+    <c:showDLblsOverMax val="1"/>
   </c:chart>
   <c:spPr>
     <a:noFill/>
@@ -1056,234 +1099,10 @@
           <a:chExt cx="0" cy="0"/>
         </a:xfrm>
       </p:grpSpPr>
-      <p:sp>
-        <p:nvSpPr>
-          <p:cNvPr id="2" name="Header Placeholder 1"/>
-          <p:cNvSpPr>
-            <a:spLocks noGrp="1"/>
-          </p:cNvSpPr>
-          <p:nvPr>
-            <p:ph type="hdr" sz="quarter"/>
-          </p:nvPr>
-        </p:nvSpPr>
-        <p:spPr>
-          <a:xfrm>
-            <a:off x="0" y="0"/>
-            <a:ext cx="2971800" cy="458788"/>
-          </a:xfrm>
-          <a:prstGeom prst="rect">
-            <a:avLst/>
-          </a:prstGeom>
-        </p:spPr>
-        <p:txBody>
-          <a:bodyPr vert="horz" lIns="91440" tIns="45720" rIns="91440" bIns="45720" rtlCol="0"/>
-          <a:lstStyle>
-            <a:lvl1pPr algn="l">
-              <a:defRPr sz="1200"/>
-            </a:lvl1pPr>
-          </a:lstStyle>
-          <a:p>
-            <a:endParaRPr lang="en-US"/>
-          </a:p>
-        </p:txBody>
-      </p:sp>
-      <p:sp>
-        <p:nvSpPr>
-          <p:cNvPr id="3" name="Date Placeholder 2"/>
-          <p:cNvSpPr>
-            <a:spLocks noGrp="1"/>
-          </p:cNvSpPr>
-          <p:nvPr>
-            <p:ph type="dt" idx="1"/>
-          </p:nvPr>
-        </p:nvSpPr>
-        <p:spPr>
-          <a:xfrm>
-            <a:off x="3884613" y="0"/>
-            <a:ext cx="2971800" cy="458788"/>
-          </a:xfrm>
-          <a:prstGeom prst="rect">
-            <a:avLst/>
-          </a:prstGeom>
-        </p:spPr>
-        <p:txBody>
-          <a:bodyPr vert="horz" lIns="91440" tIns="45720" rIns="91440" bIns="45720" rtlCol="0"/>
-          <a:lstStyle>
-            <a:lvl1pPr algn="r">
-              <a:defRPr sz="1200"/>
-            </a:lvl1pPr>
-          </a:lstStyle>
-          <a:p>
-            <a:fld id="{5282F153-3F37-0F45-9E97-73ACFA13230C}" type="datetimeFigureOut">
-              <a:rPr lang="en-US"/>
-              <a:t>7/23/19</a:t>
-            </a:fld>
-            <a:endParaRPr lang="en-US"/>
-          </a:p>
-        </p:txBody>
-      </p:sp>
-      <p:sp>
-        <p:nvSpPr>
-          <p:cNvPr id="4" name="Slide Image Placeholder 3"/>
-          <p:cNvSpPr>
-            <a:spLocks noGrp="1" noRot="1" noChangeAspect="1"/>
-          </p:cNvSpPr>
-          <p:nvPr>
-            <p:ph type="sldImg" idx="2"/>
-          </p:nvPr>
-        </p:nvSpPr>
-        <p:spPr>
-          <a:xfrm>
-            <a:off x="685800" y="1143000"/>
-            <a:ext cx="5486400" cy="3086100"/>
-          </a:xfrm>
-          <a:prstGeom prst="rect">
-            <a:avLst/>
-          </a:prstGeom>
-          <a:noFill/>
-          <a:ln w="12700">
-            <a:solidFill>
-              <a:prstClr val="black"/>
-            </a:solidFill>
-          </a:ln>
-        </p:spPr>
-        <p:txBody>
-          <a:bodyPr vert="horz" lIns="91440" tIns="45720" rIns="91440" bIns="45720" rtlCol="0" anchor="ctr"/>
-          <a:lstStyle/>
-          <a:p>
-            <a:endParaRPr lang="en-US"/>
-          </a:p>
-        </p:txBody>
-      </p:sp>
-      <p:sp>
-        <p:nvSpPr>
-          <p:cNvPr id="5" name="Notes Placeholder 4"/>
-          <p:cNvSpPr>
-            <a:spLocks noGrp="1"/>
-          </p:cNvSpPr>
-          <p:nvPr>
-            <p:ph type="body" sz="quarter" idx="3"/>
-          </p:nvPr>
-        </p:nvSpPr>
-        <p:spPr>
-          <a:xfrm>
-            <a:off x="685800" y="4400550"/>
-            <a:ext cx="5486400" cy="3600450"/>
-          </a:xfrm>
-          <a:prstGeom prst="rect">
-            <a:avLst/>
-          </a:prstGeom>
-        </p:spPr>
-        <p:txBody>
-          <a:bodyPr vert="horz" lIns="91440" tIns="45720" rIns="91440" bIns="45720" rtlCol="0"/>
-          <a:lstStyle/>
-          <a:p>
-            <a:pPr lvl="0"/>
-            <a:r>
-              <a:rPr lang="en-US"/>
-              <a:t>Click to edit Master text styles</a:t>
-            </a:r>
-          </a:p>
-          <a:p>
-            <a:pPr lvl="1"/>
-            <a:r>
-              <a:rPr lang="en-US"/>
-              <a:t>Second level</a:t>
-            </a:r>
-          </a:p>
-          <a:p>
-            <a:pPr lvl="2"/>
-            <a:r>
-              <a:rPr lang="en-US"/>
-              <a:t>Third level</a:t>
-            </a:r>
-          </a:p>
-          <a:p>
-            <a:pPr lvl="3"/>
-            <a:r>
-              <a:rPr lang="en-US"/>
-              <a:t>Fourth level</a:t>
-            </a:r>
-          </a:p>
-          <a:p>
-            <a:pPr lvl="4"/>
-            <a:r>
-              <a:rPr lang="en-US"/>
-              <a:t>Fifth level</a:t>
-            </a:r>
-          </a:p>
-        </p:txBody>
-      </p:sp>
-      <p:sp>
-        <p:nvSpPr>
-          <p:cNvPr id="6" name="Footer Placeholder 5"/>
-          <p:cNvSpPr>
-            <a:spLocks noGrp="1"/>
-          </p:cNvSpPr>
-          <p:nvPr>
-            <p:ph type="ftr" sz="quarter" idx="4"/>
-          </p:nvPr>
-        </p:nvSpPr>
-        <p:spPr>
-          <a:xfrm>
-            <a:off x="0" y="8685213"/>
-            <a:ext cx="2971800" cy="458787"/>
-          </a:xfrm>
-          <a:prstGeom prst="rect">
-            <a:avLst/>
-          </a:prstGeom>
-        </p:spPr>
-        <p:txBody>
-          <a:bodyPr vert="horz" lIns="91440" tIns="45720" rIns="91440" bIns="45720" rtlCol="0" anchor="b"/>
-          <a:lstStyle>
-            <a:lvl1pPr algn="l">
-              <a:defRPr sz="1200"/>
-            </a:lvl1pPr>
-          </a:lstStyle>
-          <a:p>
-            <a:endParaRPr lang="en-US"/>
-          </a:p>
-        </p:txBody>
-      </p:sp>
-      <p:sp>
-        <p:nvSpPr>
-          <p:cNvPr id="7" name="Slide Number Placeholder 6"/>
-          <p:cNvSpPr>
-            <a:spLocks noGrp="1"/>
-          </p:cNvSpPr>
-          <p:nvPr>
-            <p:ph type="sldNum" sz="quarter" idx="5"/>
-          </p:nvPr>
-        </p:nvSpPr>
-        <p:spPr>
-          <a:xfrm>
-            <a:off x="3884613" y="8685213"/>
-            <a:ext cx="2971800" cy="458787"/>
-          </a:xfrm>
-          <a:prstGeom prst="rect">
-            <a:avLst/>
-          </a:prstGeom>
-        </p:spPr>
-        <p:txBody>
-          <a:bodyPr vert="horz" lIns="91440" tIns="45720" rIns="91440" bIns="45720" rtlCol="0" anchor="b"/>
-          <a:lstStyle>
-            <a:lvl1pPr algn="r">
-              <a:defRPr sz="1200"/>
-            </a:lvl1pPr>
-          </a:lstStyle>
-          <a:p>
-            <a:fld id="{CE5E9CC1-C706-0F49-92D6-E571CC5EEA8F}" type="slidenum">
-              <a:rPr lang="en-US"/>
-              <a:t>‹#›</a:t>
-            </a:fld>
-            <a:endParaRPr lang="en-US"/>
-          </a:p>
-        </p:txBody>
-      </p:sp>
     </p:spTree>
     <p:extLst>
       <p:ext uri="{BB962C8B-B14F-4D97-AF65-F5344CB8AC3E}">
-        <p14:creationId xmlns:p14="http://schemas.microsoft.com/office/powerpoint/2010/main" val="1024086991"/>
+        <p14:creationId xmlns:p14="http://schemas.microsoft.com/office/powerpoint/2010/main" val="3439981206"/>
       </p:ext>
     </p:extLst>
   </p:cSld>
@@ -1431,7 +1250,6 @@
               <a:rPr lang="en-US" dirty="0"/>
               <a:t>Köszöntés, a vállalkozás bemutatása: a FixPont egy kitalált mobiltelefon-szerviz mikrovállalkozás.</a:t>
             </a:r>
-            <a:endParaRPr lang="en-US" dirty="0"/>
           </a:p>
         </p:txBody>
       </p:sp>
@@ -1519,7 +1337,6 @@
               <a:rPr lang="en-US" dirty="0"/>
               <a:t>Zárás, kapcsolati adatok. A cím és elérhetőségek kitalált.</a:t>
             </a:r>
-            <a:endParaRPr lang="en-US" dirty="0"/>
           </a:p>
         </p:txBody>
       </p:sp>
@@ -1607,7 +1424,6 @@
               <a:rPr lang="en-US" dirty="0"/>
               <a:t>A küldetés lényege a gyorsaság és az átláthatóság. A három szám a vállalkozás ígéretei.</a:t>
             </a:r>
-            <a:endParaRPr lang="en-US" dirty="0"/>
           </a:p>
         </p:txBody>
       </p:sp>
@@ -1695,7 +1511,6 @@
               <a:rPr lang="en-US" dirty="0"/>
               <a:t>Hat fő szolgáltatási csoport. A részletes árakat a következő dián mutatjuk.</a:t>
             </a:r>
-            <a:endParaRPr lang="en-US" dirty="0"/>
           </a:p>
         </p:txBody>
       </p:sp>
@@ -1783,7 +1598,6 @@
               <a:rPr lang="en-US" dirty="0"/>
               <a:t>A kezdő árak fix árak a leggyakoribb típusokra, a többi típusnál előzetes árajánlatot adunk.</a:t>
             </a:r>
-            <a:endParaRPr lang="en-US" dirty="0"/>
           </a:p>
         </p:txBody>
       </p:sp>
@@ -1871,7 +1685,6 @@
               <a:rPr lang="en-US" dirty="0"/>
               <a:t>Négy lépéses folyamat, minden lépésnél az átláthatóság a cél.</a:t>
             </a:r>
-            <a:endParaRPr lang="en-US" dirty="0"/>
           </a:p>
         </p:txBody>
       </p:sp>
@@ -1959,7 +1772,6 @@
               <a:rPr lang="en-US" dirty="0"/>
               <a:t>A célcsoport tág, de a fő bázis a 18–40 éves, okostelefonra támaszkodó réteg.</a:t>
             </a:r>
-            <a:endParaRPr lang="en-US" dirty="0"/>
           </a:p>
         </p:txBody>
       </p:sp>
@@ -2047,7 +1859,6 @@
               <a:rPr lang="en-US" dirty="0"/>
               <a:t>A két grafikon a forgalmi Excel munkafüzet (2. rész) Összesítés munkalapjáról származik: bal oldalt a havi bevétel és kiadás oszlopdiagramja, jobb oldalt az éves kiadás-megoszlás perec (fánk) diagramja. A diagramok ugyanazok, mint a forgalmi munkafüzetben.</a:t>
             </a:r>
-            <a:endParaRPr lang="en-US" dirty="0"/>
           </a:p>
         </p:txBody>
       </p:sp>
@@ -2135,7 +1946,6 @@
               <a:rPr lang="en-US" dirty="0"/>
               <a:t>Az adatok kitalált, a forgalmi Excel munkafüzetből (2. rész) származnak. Nyereség = bevétel – kiadás.</a:t>
             </a:r>
-            <a:endParaRPr lang="en-US" dirty="0"/>
           </a:p>
         </p:txBody>
       </p:sp>
@@ -2223,7 +2033,6 @@
               <a:rPr lang="en-US" dirty="0"/>
               <a:t>A weblapról az összes projektdokumentum elérhető, az űrlap linkje is itt található.</a:t>
             </a:r>
-            <a:endParaRPr lang="en-US" dirty="0"/>
           </a:p>
         </p:txBody>
       </p:sp>
@@ -2301,6 +2110,7 @@
         <a:solidFill>
           <a:srgbClr val="111827"/>
         </a:solidFill>
+        <a:effectLst/>
       </p:bgPr>
     </p:bg>
     <p:spTree>
@@ -2320,9 +2130,11 @@
       <p:sp>
         <p:nvSpPr>
           <p:cNvPr id="2" name="Text 0"/>
-          <p:cNvSpPr/>
+          <p:cNvSpPr>
+            <a:spLocks noGrp="1"/>
+          </p:cNvSpPr>
           <p:nvPr>
-            <p:ph idx="100" type="title" hasCustomPrompt="1"/>
+            <p:ph type="title" idx="100" hasCustomPrompt="1"/>
           </p:nvPr>
         </p:nvSpPr>
         <p:spPr>
@@ -2339,7 +2151,7 @@
         <p:txBody>
           <a:bodyPr wrap="square" rtlCol="0"/>
           <a:lstStyle>
-            <a:lvl1pPr algn="l" indent="0" marL="0">
+            <a:lvl1pPr marL="0" indent="0" algn="l">
               <a:buNone/>
               <a:defRPr lang="en-US" sz="4000" b="1" dirty="0">
                 <a:solidFill>
@@ -2349,7 +2161,7 @@
             </a:lvl1pPr>
           </a:lstStyle>
           <a:p>
-            <a:pPr algn="l" indent="0" marL="0">
+            <a:pPr marL="0" indent="0" algn="l">
               <a:buNone/>
             </a:pPr>
             <a:endParaRPr lang="en-US" sz="4000" dirty="0"/>
@@ -2372,6 +2184,7 @@
         <a:solidFill>
           <a:srgbClr val="FFFFFF"/>
         </a:solidFill>
+        <a:effectLst/>
       </p:bgPr>
     </p:bg>
     <p:spTree>
@@ -2391,9 +2204,11 @@
       <p:sp>
         <p:nvSpPr>
           <p:cNvPr id="2" name="Text 0"/>
-          <p:cNvSpPr/>
+          <p:cNvSpPr>
+            <a:spLocks noGrp="1"/>
+          </p:cNvSpPr>
           <p:nvPr>
-            <p:ph idx="100" type="title" hasCustomPrompt="1"/>
+            <p:ph type="title" idx="100" hasCustomPrompt="1"/>
           </p:nvPr>
         </p:nvSpPr>
         <p:spPr>
@@ -2410,7 +2225,7 @@
         <p:txBody>
           <a:bodyPr wrap="square" rtlCol="0"/>
           <a:lstStyle>
-            <a:lvl1pPr algn="l" indent="0" marL="0">
+            <a:lvl1pPr marL="0" indent="0" algn="l">
               <a:buNone/>
               <a:defRPr lang="en-US" sz="3400" b="1" dirty="0">
                 <a:solidFill>
@@ -2420,7 +2235,7 @@
             </a:lvl1pPr>
           </a:lstStyle>
           <a:p>
-            <a:pPr algn="l" indent="0" marL="0">
+            <a:pPr marL="0" indent="0" algn="l">
               <a:buNone/>
             </a:pPr>
             <a:endParaRPr lang="en-US" sz="3400" dirty="0"/>
@@ -2448,7 +2263,7 @@
           <a:bodyPr wrap="square" lIns="0" tIns="0" rIns="0" bIns="0" rtlCol="0" anchor="ctr"/>
           <a:lstStyle/>
           <a:p>
-            <a:pPr indent="0" marL="0">
+            <a:pPr marL="0" indent="0">
               <a:buNone/>
             </a:pPr>
             <a:r>
@@ -2483,7 +2298,7 @@
           </a:prstGeom>
           <a:extLst>
             <a:ext uri="{C572A759-6A51-4108-AA02-DFA0A04FC94B}">
-              <ma14:wrappingTextBoxFlag xmlns:ma14="http://schemas.microsoft.com/office/mac/drawingml/2011/main" val="0"/>
+              <ma14:wrappingTextBoxFlag xmlns:ma14="http://schemas.microsoft.com/office/mac/drawingml/2011/main" xmlns="" val="0"/>
             </a:ext>
           </a:extLst>
         </p:spPr>
@@ -2501,8 +2316,8 @@
           <a:p>
             <a:pPr algn="r"/>
             <a:fld id="{F7021451-1387-4CA6-816F-3879F97B5CBC}" type="slidenum">
-              <a:rPr b="0" lang="en-US"/>
-              <a:t>1003</a:t>
+              <a:rPr lang="en-US" b="0"/>
+              <a:t>‹#›</a:t>
             </a:fld>
             <a:endParaRPr lang="en-US"/>
           </a:p>
@@ -2524,6 +2339,7 @@
         <a:solidFill>
           <a:srgbClr val="F3F4F6"/>
         </a:solidFill>
+        <a:effectLst/>
       </p:bgPr>
     </p:bg>
     <p:spTree>
@@ -2543,9 +2359,11 @@
       <p:sp>
         <p:nvSpPr>
           <p:cNvPr id="2" name="Text 0"/>
-          <p:cNvSpPr/>
+          <p:cNvSpPr>
+            <a:spLocks noGrp="1"/>
+          </p:cNvSpPr>
           <p:nvPr>
-            <p:ph idx="100" type="title" hasCustomPrompt="1"/>
+            <p:ph type="title" idx="100" hasCustomPrompt="1"/>
           </p:nvPr>
         </p:nvSpPr>
         <p:spPr>
@@ -2562,7 +2380,7 @@
         <p:txBody>
           <a:bodyPr wrap="square" rtlCol="0"/>
           <a:lstStyle>
-            <a:lvl1pPr algn="l" indent="0" marL="0">
+            <a:lvl1pPr marL="0" indent="0" algn="l">
               <a:buNone/>
               <a:defRPr lang="en-US" sz="3400" b="1" dirty="0">
                 <a:solidFill>
@@ -2572,7 +2390,7 @@
             </a:lvl1pPr>
           </a:lstStyle>
           <a:p>
-            <a:pPr algn="l" indent="0" marL="0">
+            <a:pPr marL="0" indent="0" algn="l">
               <a:buNone/>
             </a:pPr>
             <a:endParaRPr lang="en-US" sz="3400" dirty="0"/>
@@ -2600,7 +2418,7 @@
           <a:bodyPr wrap="square" lIns="0" tIns="0" rIns="0" bIns="0" rtlCol="0" anchor="ctr"/>
           <a:lstStyle/>
           <a:p>
-            <a:pPr indent="0" marL="0">
+            <a:pPr marL="0" indent="0">
               <a:buNone/>
             </a:pPr>
             <a:r>
@@ -2635,7 +2453,7 @@
           </a:prstGeom>
           <a:extLst>
             <a:ext uri="{C572A759-6A51-4108-AA02-DFA0A04FC94B}">
-              <ma14:wrappingTextBoxFlag xmlns:ma14="http://schemas.microsoft.com/office/mac/drawingml/2011/main" val="0"/>
+              <ma14:wrappingTextBoxFlag xmlns:ma14="http://schemas.microsoft.com/office/mac/drawingml/2011/main" xmlns="" val="0"/>
             </a:ext>
           </a:extLst>
         </p:spPr>
@@ -2653,8 +2471,8 @@
           <a:p>
             <a:pPr algn="r"/>
             <a:fld id="{F7021451-1387-4CA6-816F-3879F97B5CBC}" type="slidenum">
-              <a:rPr b="0" lang="en-US"/>
-              <a:t>1004</a:t>
+              <a:rPr lang="en-US" b="0"/>
+              <a:t>‹#›</a:t>
             </a:fld>
             <a:endParaRPr lang="en-US"/>
           </a:p>
@@ -2671,6 +2489,11 @@
 <file path=ppt/slideMasters/slideMaster1.xml><?xml version="1.0" encoding="utf-8"?>
 <p:sldMaster xmlns:a="http://schemas.openxmlformats.org/drawingml/2006/main" xmlns:r="http://schemas.openxmlformats.org/officeDocument/2006/relationships" xmlns:p="http://schemas.openxmlformats.org/presentationml/2006/main">
   <p:cSld>
+    <p:bg>
+      <p:bgRef idx="1001">
+        <a:schemeClr val="bg1"/>
+      </p:bgRef>
+    </p:bg>
     <p:spTree>
       <p:nvGrpSpPr>
         <p:cNvPr id="1" name=""/>
@@ -2705,7 +2528,7 @@
           </a:prstGeom>
           <a:extLst>
             <a:ext uri="{C572A759-6A51-4108-AA02-DFA0A04FC94B}">
-              <ma14:wrappingTextBoxFlag xmlns:ma14="http://schemas.microsoft.com/office/mac/drawingml/2011/main" val="0"/>
+              <ma14:wrappingTextBoxFlag xmlns:ma14="http://schemas.microsoft.com/office/mac/drawingml/2011/main" xmlns="" val="0"/>
             </a:ext>
           </a:extLst>
         </p:spPr>
@@ -2723,8 +2546,8 @@
           <a:p>
             <a:pPr algn="r"/>
             <a:fld id="{F7021451-1387-4CA6-816F-3879F97B5CBC}" type="slidenum">
-              <a:rPr b="0" lang="en-US"/>
-              <a:t>null</a:t>
+              <a:rPr lang="en-US" b="0"/>
+              <a:t>‹#›</a:t>
             </a:fld>
             <a:endParaRPr lang="en-US"/>
           </a:p>
@@ -3013,9 +2836,11 @@
       <p:sp>
         <p:nvSpPr>
           <p:cNvPr id="2" name="Text 0"/>
-          <p:cNvSpPr/>
+          <p:cNvSpPr>
+            <a:spLocks noGrp="1"/>
+          </p:cNvSpPr>
           <p:nvPr>
-            <p:ph idx="100" type="title" hasCustomPrompt="1"/>
+            <p:ph type="title" idx="100" hasCustomPrompt="1"/>
           </p:nvPr>
         </p:nvSpPr>
         <p:spPr>
@@ -3033,7 +2858,7 @@
           <a:bodyPr wrap="square" lIns="0" tIns="0" rIns="0" bIns="0" rtlCol="0" anchor="t"/>
           <a:lstStyle/>
           <a:p>
-            <a:pPr algn="l" indent="0" marL="0">
+            <a:pPr marL="0" indent="0" algn="l">
               <a:buNone/>
             </a:pPr>
             <a:r>
@@ -3069,7 +2894,7 @@
           <a:bodyPr wrap="square" lIns="0" tIns="0" rIns="0" bIns="0" rtlCol="0" anchor="ctr"/>
           <a:lstStyle/>
           <a:p>
-            <a:pPr indent="0" marL="0">
+            <a:pPr marL="0" indent="0">
               <a:buNone/>
             </a:pPr>
             <a:r>
@@ -3105,7 +2930,7 @@
           <a:bodyPr wrap="square" lIns="0" tIns="0" rIns="0" bIns="0" rtlCol="0" anchor="ctr"/>
           <a:lstStyle/>
           <a:p>
-            <a:pPr indent="0" marL="0">
+            <a:pPr marL="0" indent="0">
               <a:buNone/>
             </a:pPr>
             <a:r>
@@ -3122,14 +2947,14 @@
       </p:sp>
       <p:pic>
         <p:nvPicPr>
-          <p:cNvPr id="5" name="Image 0" descr="Okostelefon ellenőrző jellel">    </p:cNvPr>
+          <p:cNvPr id="5" name="Image 0" descr="Okostelefon ellenőrző jellel"/>
           <p:cNvPicPr>
             <a:picLocks noChangeAspect="1"/>
           </p:cNvPicPr>
           <p:nvPr/>
         </p:nvPicPr>
         <p:blipFill>
-          <a:blip r:embed="rId1"/>
+          <a:blip r:embed="rId3"/>
           <a:stretch>
             <a:fillRect/>
           </a:stretch>
@@ -3172,9 +2997,11 @@
       <p:sp>
         <p:nvSpPr>
           <p:cNvPr id="2" name="Text 0"/>
-          <p:cNvSpPr/>
+          <p:cNvSpPr>
+            <a:spLocks noGrp="1"/>
+          </p:cNvSpPr>
           <p:nvPr>
-            <p:ph idx="100" type="title" hasCustomPrompt="1"/>
+            <p:ph type="title" idx="100" hasCustomPrompt="1"/>
           </p:nvPr>
         </p:nvSpPr>
         <p:spPr>
@@ -3192,7 +3019,7 @@
           <a:bodyPr wrap="square" lIns="0" tIns="0" rIns="0" bIns="0" rtlCol="0" anchor="t"/>
           <a:lstStyle/>
           <a:p>
-            <a:pPr algn="l" indent="0" marL="0">
+            <a:pPr marL="0" indent="0" algn="l">
               <a:buNone/>
             </a:pPr>
             <a:r>
@@ -3209,127 +3036,7 @@
       </p:sp>
       <p:pic>
         <p:nvPicPr>
-          <p:cNvPr id="3" name="Image 0" descr="pin">    </p:cNvPr>
-          <p:cNvPicPr>
-            <a:picLocks noChangeAspect="1"/>
-          </p:cNvPicPr>
-          <p:nvPr/>
-        </p:nvPicPr>
-        <p:blipFill>
-          <a:blip r:embed="rId1"/>
-          <a:stretch>
-            <a:fillRect/>
-          </a:stretch>
-        </p:blipFill>
-        <p:spPr>
-          <a:xfrm>
-            <a:off x="548640" y="2971800"/>
-            <a:ext cx="228600" cy="228600"/>
-          </a:xfrm>
-          <a:prstGeom prst="rect">
-            <a:avLst/>
-          </a:prstGeom>
-        </p:spPr>
-      </p:pic>
-      <p:sp>
-        <p:nvSpPr>
-          <p:cNvPr id="4" name="Text 1"/>
-          <p:cNvSpPr txBox="1"/>
-          <p:nvPr/>
-        </p:nvSpPr>
-        <p:spPr>
-          <a:xfrm>
-            <a:off x="960120" y="2926080"/>
-            <a:ext cx="4023360" cy="320040"/>
-          </a:xfrm>
-          <a:prstGeom prst="rect">
-            <a:avLst/>
-          </a:prstGeom>
-          <a:noFill/>
-          <a:ln/>
-        </p:spPr>
-        <p:txBody>
-          <a:bodyPr wrap="square" lIns="0" tIns="0" rIns="0" bIns="0" rtlCol="0" anchor="ctr"/>
-          <a:lstStyle/>
-          <a:p>
-            <a:pPr indent="0" marL="0">
-              <a:buNone/>
-            </a:pPr>
-            <a:r>
-              <a:rPr lang="en-US" sz="1400" dirty="0">
-                <a:solidFill>
-                  <a:srgbClr val="F3F4F6"/>
-                </a:solidFill>
-              </a:rPr>
-              <a:t>1111 Budapest, Minta utca 12.</a:t>
-            </a:r>
-            <a:endParaRPr lang="en-US" sz="1400" dirty="0"/>
-          </a:p>
-        </p:txBody>
-      </p:sp>
-      <p:pic>
-        <p:nvPicPr>
-          <p:cNvPr id="5" name="Image 1" descr="phone">    </p:cNvPr>
-          <p:cNvPicPr>
-            <a:picLocks noChangeAspect="1"/>
-          </p:cNvPicPr>
-          <p:nvPr/>
-        </p:nvPicPr>
-        <p:blipFill>
-          <a:blip r:embed="rId2"/>
-          <a:stretch>
-            <a:fillRect/>
-          </a:stretch>
-        </p:blipFill>
-        <p:spPr>
-          <a:xfrm>
-            <a:off x="548640" y="3355848"/>
-            <a:ext cx="228600" cy="228600"/>
-          </a:xfrm>
-          <a:prstGeom prst="rect">
-            <a:avLst/>
-          </a:prstGeom>
-        </p:spPr>
-      </p:pic>
-      <p:sp>
-        <p:nvSpPr>
-          <p:cNvPr id="6" name="Text 2"/>
-          <p:cNvSpPr txBox="1"/>
-          <p:nvPr/>
-        </p:nvSpPr>
-        <p:spPr>
-          <a:xfrm>
-            <a:off x="960120" y="3310128"/>
-            <a:ext cx="4023360" cy="320040"/>
-          </a:xfrm>
-          <a:prstGeom prst="rect">
-            <a:avLst/>
-          </a:prstGeom>
-          <a:noFill/>
-          <a:ln/>
-        </p:spPr>
-        <p:txBody>
-          <a:bodyPr wrap="square" lIns="0" tIns="0" rIns="0" bIns="0" rtlCol="0" anchor="ctr"/>
-          <a:lstStyle/>
-          <a:p>
-            <a:pPr indent="0" marL="0">
-              <a:buNone/>
-            </a:pPr>
-            <a:r>
-              <a:rPr lang="en-US" sz="1400" dirty="0">
-                <a:solidFill>
-                  <a:srgbClr val="F3F4F6"/>
-                </a:solidFill>
-              </a:rPr>
-              <a:t>+36 30 000 0000</a:t>
-            </a:r>
-            <a:endParaRPr lang="en-US" sz="1400" dirty="0"/>
-          </a:p>
-        </p:txBody>
-      </p:sp>
-      <p:pic>
-        <p:nvPicPr>
-          <p:cNvPr id="7" name="Image 2" descr="mail">    </p:cNvPr>
+          <p:cNvPr id="3" name="Image 0" descr="pin"/>
           <p:cNvPicPr>
             <a:picLocks noChangeAspect="1"/>
           </p:cNvPicPr>
@@ -3343,7 +3050,7 @@
         </p:blipFill>
         <p:spPr>
           <a:xfrm>
-            <a:off x="548640" y="3739896"/>
+            <a:off x="548640" y="2971800"/>
             <a:ext cx="228600" cy="228600"/>
           </a:xfrm>
           <a:prstGeom prst="rect">
@@ -3353,13 +3060,13 @@
       </p:pic>
       <p:sp>
         <p:nvSpPr>
-          <p:cNvPr id="8" name="Text 3"/>
+          <p:cNvPr id="4" name="Text 1"/>
           <p:cNvSpPr txBox="1"/>
           <p:nvPr/>
         </p:nvSpPr>
         <p:spPr>
           <a:xfrm>
-            <a:off x="960120" y="3694176"/>
+            <a:off x="960120" y="2926080"/>
             <a:ext cx="4023360" cy="320040"/>
           </a:xfrm>
           <a:prstGeom prst="rect">
@@ -3372,7 +3079,7 @@
           <a:bodyPr wrap="square" lIns="0" tIns="0" rIns="0" bIns="0" rtlCol="0" anchor="ctr"/>
           <a:lstStyle/>
           <a:p>
-            <a:pPr indent="0" marL="0">
+            <a:pPr marL="0" indent="0">
               <a:buNone/>
             </a:pPr>
             <a:r>
@@ -3381,7 +3088,7 @@
                   <a:srgbClr val="F3F4F6"/>
                 </a:solidFill>
               </a:rPr>
-              <a:t>info@fixpont.example</a:t>
+              <a:t>1111 Budapest, Minta utca 12.</a:t>
             </a:r>
             <a:endParaRPr lang="en-US" sz="1400" dirty="0"/>
           </a:p>
@@ -3389,7 +3096,7 @@
       </p:sp>
       <p:pic>
         <p:nvPicPr>
-          <p:cNvPr id="9" name="Image 3" descr="clock">    </p:cNvPr>
+          <p:cNvPr id="5" name="Image 1" descr="phone"/>
           <p:cNvPicPr>
             <a:picLocks noChangeAspect="1"/>
           </p:cNvPicPr>
@@ -3403,7 +3110,7 @@
         </p:blipFill>
         <p:spPr>
           <a:xfrm>
-            <a:off x="548640" y="4123944"/>
+            <a:off x="548640" y="3355848"/>
             <a:ext cx="228600" cy="228600"/>
           </a:xfrm>
           <a:prstGeom prst="rect">
@@ -3413,13 +3120,13 @@
       </p:pic>
       <p:sp>
         <p:nvSpPr>
-          <p:cNvPr id="10" name="Text 4"/>
+          <p:cNvPr id="6" name="Text 2"/>
           <p:cNvSpPr txBox="1"/>
           <p:nvPr/>
         </p:nvSpPr>
         <p:spPr>
           <a:xfrm>
-            <a:off x="960120" y="4078224"/>
+            <a:off x="960120" y="3310128"/>
             <a:ext cx="4023360" cy="320040"/>
           </a:xfrm>
           <a:prstGeom prst="rect">
@@ -3432,7 +3139,7 @@
           <a:bodyPr wrap="square" lIns="0" tIns="0" rIns="0" bIns="0" rtlCol="0" anchor="ctr"/>
           <a:lstStyle/>
           <a:p>
-            <a:pPr indent="0" marL="0">
+            <a:pPr marL="0" indent="0">
               <a:buNone/>
             </a:pPr>
             <a:r>
@@ -3441,6 +3148,126 @@
                   <a:srgbClr val="F3F4F6"/>
                 </a:solidFill>
               </a:rPr>
+              <a:t>+36 30 000 0000</a:t>
+            </a:r>
+            <a:endParaRPr lang="en-US" sz="1400" dirty="0"/>
+          </a:p>
+        </p:txBody>
+      </p:sp>
+      <p:pic>
+        <p:nvPicPr>
+          <p:cNvPr id="7" name="Image 2" descr="mail"/>
+          <p:cNvPicPr>
+            <a:picLocks noChangeAspect="1"/>
+          </p:cNvPicPr>
+          <p:nvPr/>
+        </p:nvPicPr>
+        <p:blipFill>
+          <a:blip r:embed="rId5"/>
+          <a:stretch>
+            <a:fillRect/>
+          </a:stretch>
+        </p:blipFill>
+        <p:spPr>
+          <a:xfrm>
+            <a:off x="548640" y="3739896"/>
+            <a:ext cx="228600" cy="228600"/>
+          </a:xfrm>
+          <a:prstGeom prst="rect">
+            <a:avLst/>
+          </a:prstGeom>
+        </p:spPr>
+      </p:pic>
+      <p:sp>
+        <p:nvSpPr>
+          <p:cNvPr id="8" name="Text 3"/>
+          <p:cNvSpPr txBox="1"/>
+          <p:nvPr/>
+        </p:nvSpPr>
+        <p:spPr>
+          <a:xfrm>
+            <a:off x="960120" y="3694176"/>
+            <a:ext cx="4023360" cy="320040"/>
+          </a:xfrm>
+          <a:prstGeom prst="rect">
+            <a:avLst/>
+          </a:prstGeom>
+          <a:noFill/>
+          <a:ln/>
+        </p:spPr>
+        <p:txBody>
+          <a:bodyPr wrap="square" lIns="0" tIns="0" rIns="0" bIns="0" rtlCol="0" anchor="ctr"/>
+          <a:lstStyle/>
+          <a:p>
+            <a:pPr marL="0" indent="0">
+              <a:buNone/>
+            </a:pPr>
+            <a:r>
+              <a:rPr lang="en-US" sz="1400" dirty="0">
+                <a:solidFill>
+                  <a:srgbClr val="F3F4F6"/>
+                </a:solidFill>
+              </a:rPr>
+              <a:t>info@fixpont.example</a:t>
+            </a:r>
+            <a:endParaRPr lang="en-US" sz="1400" dirty="0"/>
+          </a:p>
+        </p:txBody>
+      </p:sp>
+      <p:pic>
+        <p:nvPicPr>
+          <p:cNvPr id="9" name="Image 3" descr="clock"/>
+          <p:cNvPicPr>
+            <a:picLocks noChangeAspect="1"/>
+          </p:cNvPicPr>
+          <p:nvPr/>
+        </p:nvPicPr>
+        <p:blipFill>
+          <a:blip r:embed="rId6"/>
+          <a:stretch>
+            <a:fillRect/>
+          </a:stretch>
+        </p:blipFill>
+        <p:spPr>
+          <a:xfrm>
+            <a:off x="548640" y="4123944"/>
+            <a:ext cx="228600" cy="228600"/>
+          </a:xfrm>
+          <a:prstGeom prst="rect">
+            <a:avLst/>
+          </a:prstGeom>
+        </p:spPr>
+      </p:pic>
+      <p:sp>
+        <p:nvSpPr>
+          <p:cNvPr id="10" name="Text 4"/>
+          <p:cNvSpPr txBox="1"/>
+          <p:nvPr/>
+        </p:nvSpPr>
+        <p:spPr>
+          <a:xfrm>
+            <a:off x="960120" y="4078224"/>
+            <a:ext cx="4023360" cy="320040"/>
+          </a:xfrm>
+          <a:prstGeom prst="rect">
+            <a:avLst/>
+          </a:prstGeom>
+          <a:noFill/>
+          <a:ln/>
+        </p:spPr>
+        <p:txBody>
+          <a:bodyPr wrap="square" lIns="0" tIns="0" rIns="0" bIns="0" rtlCol="0" anchor="ctr"/>
+          <a:lstStyle/>
+          <a:p>
+            <a:pPr marL="0" indent="0">
+              <a:buNone/>
+            </a:pPr>
+            <a:r>
+              <a:rPr lang="en-US" sz="1400" dirty="0">
+                <a:solidFill>
+                  <a:srgbClr val="F3F4F6"/>
+                </a:solidFill>
+              </a:rPr>
               <a:t>H–P 9–18, Szo 9–13</a:t>
             </a:r>
             <a:endParaRPr lang="en-US" sz="1400" dirty="0"/>
@@ -3449,14 +3276,14 @@
       </p:sp>
       <p:pic>
         <p:nvPicPr>
-          <p:cNvPr id="11" name="Image 4" descr="Okostelefon ellenőrző jellel">    </p:cNvPr>
+          <p:cNvPr id="11" name="Image 4" descr="Okostelefon ellenőrző jellel"/>
           <p:cNvPicPr>
             <a:picLocks noChangeAspect="1"/>
           </p:cNvPicPr>
           <p:nvPr/>
         </p:nvPicPr>
         <p:blipFill>
-          <a:blip r:embed="rId5"/>
+          <a:blip r:embed="rId7"/>
           <a:stretch>
             <a:fillRect/>
           </a:stretch>
@@ -3499,9 +3326,11 @@
       <p:sp>
         <p:nvSpPr>
           <p:cNvPr id="2" name="Text 0"/>
-          <p:cNvSpPr/>
+          <p:cNvSpPr>
+            <a:spLocks noGrp="1"/>
+          </p:cNvSpPr>
           <p:nvPr>
-            <p:ph idx="100" type="title" hasCustomPrompt="1"/>
+            <p:ph type="title" idx="100" hasCustomPrompt="1"/>
           </p:nvPr>
         </p:nvSpPr>
         <p:spPr>
@@ -3519,7 +3348,7 @@
           <a:bodyPr wrap="square" lIns="0" tIns="0" rIns="0" bIns="0" rtlCol="0" anchor="ctr"/>
           <a:lstStyle/>
           <a:p>
-            <a:pPr algn="l" indent="0" marL="0">
+            <a:pPr marL="0" indent="0" algn="l">
               <a:buNone/>
             </a:pPr>
             <a:r>
@@ -3555,7 +3384,7 @@
           <a:bodyPr wrap="square" lIns="0" tIns="0" rIns="0" bIns="0" rtlCol="0" anchor="t"/>
           <a:lstStyle/>
           <a:p>
-            <a:pPr indent="0" marL="0">
+            <a:pPr marL="0" indent="0">
               <a:buNone/>
             </a:pPr>
             <a:r>
@@ -3591,7 +3420,7 @@
           <a:bodyPr wrap="square" lIns="0" tIns="0" rIns="0" bIns="0" rtlCol="0" anchor="t"/>
           <a:lstStyle/>
           <a:p>
-            <a:pPr indent="0" marL="0">
+            <a:pPr marL="0" indent="0">
               <a:buNone/>
             </a:pPr>
             <a:r>
@@ -3632,6 +3461,13 @@
             <a:prstDash val="solid"/>
           </a:ln>
         </p:spPr>
+        <p:txBody>
+          <a:bodyPr/>
+          <a:lstStyle/>
+          <a:p>
+            <a:endParaRPr lang="hu-HU"/>
+          </a:p>
+        </p:txBody>
       </p:sp>
       <p:sp>
         <p:nvSpPr>
@@ -3654,7 +3490,7 @@
           <a:bodyPr wrap="square" lIns="0" tIns="0" rIns="0" bIns="0" rtlCol="0" anchor="ctr"/>
           <a:lstStyle/>
           <a:p>
-            <a:pPr indent="0" marL="0">
+            <a:pPr marL="0" indent="0">
               <a:buNone/>
             </a:pPr>
             <a:r>
@@ -3690,7 +3526,7 @@
           <a:bodyPr wrap="square" lIns="0" tIns="0" rIns="0" bIns="0" rtlCol="0" anchor="ctr"/>
           <a:lstStyle/>
           <a:p>
-            <a:pPr indent="0" marL="0">
+            <a:pPr marL="0" indent="0">
               <a:buNone/>
             </a:pPr>
             <a:r>
@@ -3731,6 +3567,13 @@
             <a:prstDash val="solid"/>
           </a:ln>
         </p:spPr>
+        <p:txBody>
+          <a:bodyPr/>
+          <a:lstStyle/>
+          <a:p>
+            <a:endParaRPr lang="hu-HU"/>
+          </a:p>
+        </p:txBody>
       </p:sp>
       <p:sp>
         <p:nvSpPr>
@@ -3753,7 +3596,7 @@
           <a:bodyPr wrap="square" lIns="0" tIns="0" rIns="0" bIns="0" rtlCol="0" anchor="ctr"/>
           <a:lstStyle/>
           <a:p>
-            <a:pPr indent="0" marL="0">
+            <a:pPr marL="0" indent="0">
               <a:buNone/>
             </a:pPr>
             <a:r>
@@ -3789,7 +3632,7 @@
           <a:bodyPr wrap="square" lIns="0" tIns="0" rIns="0" bIns="0" rtlCol="0" anchor="ctr"/>
           <a:lstStyle/>
           <a:p>
-            <a:pPr indent="0" marL="0">
+            <a:pPr marL="0" indent="0">
               <a:buNone/>
             </a:pPr>
             <a:r>
@@ -3830,6 +3673,13 @@
             <a:prstDash val="solid"/>
           </a:ln>
         </p:spPr>
+        <p:txBody>
+          <a:bodyPr/>
+          <a:lstStyle/>
+          <a:p>
+            <a:endParaRPr lang="hu-HU"/>
+          </a:p>
+        </p:txBody>
       </p:sp>
       <p:sp>
         <p:nvSpPr>
@@ -3852,7 +3702,7 @@
           <a:bodyPr wrap="square" lIns="0" tIns="0" rIns="0" bIns="0" rtlCol="0" anchor="ctr"/>
           <a:lstStyle/>
           <a:p>
-            <a:pPr indent="0" marL="0">
+            <a:pPr marL="0" indent="0">
               <a:buNone/>
             </a:pPr>
             <a:r>
@@ -3888,7 +3738,7 @@
           <a:bodyPr wrap="square" lIns="0" tIns="0" rIns="0" bIns="0" rtlCol="0" anchor="ctr"/>
           <a:lstStyle/>
           <a:p>
-            <a:pPr indent="0" marL="0">
+            <a:pPr marL="0" indent="0">
               <a:buNone/>
             </a:pPr>
             <a:r>
@@ -3923,7 +3773,7 @@
           </a:prstGeom>
           <a:extLst>
             <a:ext uri="{C572A759-6A51-4108-AA02-DFA0A04FC94B}">
-              <ma14:wrappingTextBoxFlag xmlns:ma14="http://schemas.microsoft.com/office/mac/drawingml/2011/main" val="0"/>
+              <ma14:wrappingTextBoxFlag xmlns:ma14="http://schemas.microsoft.com/office/mac/drawingml/2011/main" xmlns="" val="0"/>
             </a:ext>
           </a:extLst>
         </p:spPr>
@@ -3941,7 +3791,7 @@
           <a:p>
             <a:pPr algn="r"/>
             <a:fld id="{F7021451-1387-4CA6-816F-3879F97B5CBC}" type="slidenum">
-              <a:rPr b="0" lang="en-US"/>
+              <a:rPr lang="en-US" b="0"/>
               <a:t>2</a:t>
             </a:fld>
             <a:endParaRPr lang="en-US"/>
@@ -3976,9 +3826,11 @@
       <p:sp>
         <p:nvSpPr>
           <p:cNvPr id="2" name="Text 0"/>
-          <p:cNvSpPr/>
+          <p:cNvSpPr>
+            <a:spLocks noGrp="1"/>
+          </p:cNvSpPr>
           <p:nvPr>
-            <p:ph idx="100" type="title" hasCustomPrompt="1"/>
+            <p:ph type="title" idx="100" hasCustomPrompt="1"/>
           </p:nvPr>
         </p:nvSpPr>
         <p:spPr>
@@ -3996,7 +3848,7 @@
           <a:bodyPr wrap="square" lIns="0" tIns="0" rIns="0" bIns="0" rtlCol="0" anchor="ctr"/>
           <a:lstStyle/>
           <a:p>
-            <a:pPr algn="l" indent="0" marL="0">
+            <a:pPr marL="0" indent="0" algn="l">
               <a:buNone/>
             </a:pPr>
             <a:r>
@@ -4037,13 +3889,20 @@
             <a:prstDash val="solid"/>
           </a:ln>
           <a:effectLst>
-            <a:outerShdw sx="100000" sy="100000" kx="0" ky="0" algn="bl" rotWithShape="0" blurRad="101600" dist="25400" dir="5400000">
+            <a:outerShdw blurRad="101600" dist="25400" dir="5400000" algn="bl" rotWithShape="0">
               <a:srgbClr val="000000">
                 <a:alpha val="12000"/>
               </a:srgbClr>
             </a:outerShdw>
           </a:effectLst>
         </p:spPr>
+        <p:txBody>
+          <a:bodyPr/>
+          <a:lstStyle/>
+          <a:p>
+            <a:endParaRPr lang="hu-HU"/>
+          </a:p>
+        </p:txBody>
       </p:sp>
       <p:sp>
         <p:nvSpPr>
@@ -4069,17 +3928,24 @@
             <a:prstDash val="solid"/>
           </a:ln>
         </p:spPr>
+        <p:txBody>
+          <a:bodyPr/>
+          <a:lstStyle/>
+          <a:p>
+            <a:endParaRPr lang="hu-HU"/>
+          </a:p>
+        </p:txBody>
       </p:sp>
       <p:pic>
         <p:nvPicPr>
-          <p:cNvPr id="5" name="Image 0" descr="screen">    </p:cNvPr>
+          <p:cNvPr id="5" name="Image 0" descr="screen"/>
           <p:cNvPicPr>
             <a:picLocks noChangeAspect="1"/>
           </p:cNvPicPr>
           <p:nvPr/>
         </p:nvPicPr>
         <p:blipFill>
-          <a:blip r:embed="rId1"/>
+          <a:blip r:embed="rId3"/>
           <a:stretch>
             <a:fillRect/>
           </a:stretch>
@@ -4115,7 +3981,7 @@
           <a:bodyPr wrap="square" lIns="0" tIns="0" rIns="0" bIns="0" rtlCol="0" anchor="ctr"/>
           <a:lstStyle/>
           <a:p>
-            <a:pPr indent="0" marL="0">
+            <a:pPr marL="0" indent="0">
               <a:buNone/>
             </a:pPr>
             <a:r>
@@ -4151,7 +4017,7 @@
           <a:bodyPr wrap="square" lIns="0" tIns="0" rIns="0" bIns="0" rtlCol="0" anchor="t"/>
           <a:lstStyle/>
           <a:p>
-            <a:pPr indent="0" marL="0">
+            <a:pPr marL="0" indent="0">
               <a:buNone/>
             </a:pPr>
             <a:r>
@@ -4192,13 +4058,20 @@
             <a:prstDash val="solid"/>
           </a:ln>
           <a:effectLst>
-            <a:outerShdw sx="100000" sy="100000" kx="0" ky="0" algn="bl" rotWithShape="0" blurRad="101600" dist="25400" dir="5400000">
+            <a:outerShdw blurRad="101600" dist="25400" dir="5400000" algn="bl" rotWithShape="0">
               <a:srgbClr val="000000">
                 <a:alpha val="12000"/>
               </a:srgbClr>
             </a:outerShdw>
           </a:effectLst>
         </p:spPr>
+        <p:txBody>
+          <a:bodyPr/>
+          <a:lstStyle/>
+          <a:p>
+            <a:endParaRPr lang="hu-HU"/>
+          </a:p>
+        </p:txBody>
       </p:sp>
       <p:sp>
         <p:nvSpPr>
@@ -4224,17 +4097,24 @@
             <a:prstDash val="solid"/>
           </a:ln>
         </p:spPr>
+        <p:txBody>
+          <a:bodyPr/>
+          <a:lstStyle/>
+          <a:p>
+            <a:endParaRPr lang="hu-HU"/>
+          </a:p>
+        </p:txBody>
       </p:sp>
       <p:pic>
         <p:nvPicPr>
-          <p:cNvPr id="10" name="Image 1" descr="battery">    </p:cNvPr>
+          <p:cNvPr id="10" name="Image 1" descr="battery"/>
           <p:cNvPicPr>
             <a:picLocks noChangeAspect="1"/>
           </p:cNvPicPr>
           <p:nvPr/>
         </p:nvPicPr>
         <p:blipFill>
-          <a:blip r:embed="rId2"/>
+          <a:blip r:embed="rId4"/>
           <a:stretch>
             <a:fillRect/>
           </a:stretch>
@@ -4270,7 +4150,7 @@
           <a:bodyPr wrap="square" lIns="0" tIns="0" rIns="0" bIns="0" rtlCol="0" anchor="ctr"/>
           <a:lstStyle/>
           <a:p>
-            <a:pPr indent="0" marL="0">
+            <a:pPr marL="0" indent="0">
               <a:buNone/>
             </a:pPr>
             <a:r>
@@ -4306,7 +4186,7 @@
           <a:bodyPr wrap="square" lIns="0" tIns="0" rIns="0" bIns="0" rtlCol="0" anchor="t"/>
           <a:lstStyle/>
           <a:p>
-            <a:pPr indent="0" marL="0">
+            <a:pPr marL="0" indent="0">
               <a:buNone/>
             </a:pPr>
             <a:r>
@@ -4347,13 +4227,20 @@
             <a:prstDash val="solid"/>
           </a:ln>
           <a:effectLst>
-            <a:outerShdw sx="100000" sy="100000" kx="0" ky="0" algn="bl" rotWithShape="0" blurRad="101600" dist="25400" dir="5400000">
+            <a:outerShdw blurRad="101600" dist="25400" dir="5400000" algn="bl" rotWithShape="0">
               <a:srgbClr val="000000">
                 <a:alpha val="12000"/>
               </a:srgbClr>
             </a:outerShdw>
           </a:effectLst>
         </p:spPr>
+        <p:txBody>
+          <a:bodyPr/>
+          <a:lstStyle/>
+          <a:p>
+            <a:endParaRPr lang="hu-HU"/>
+          </a:p>
+        </p:txBody>
       </p:sp>
       <p:sp>
         <p:nvSpPr>
@@ -4379,17 +4266,24 @@
             <a:prstDash val="solid"/>
           </a:ln>
         </p:spPr>
+        <p:txBody>
+          <a:bodyPr/>
+          <a:lstStyle/>
+          <a:p>
+            <a:endParaRPr lang="hu-HU"/>
+          </a:p>
+        </p:txBody>
       </p:sp>
       <p:pic>
         <p:nvPicPr>
-          <p:cNvPr id="15" name="Image 2" descr="plug">    </p:cNvPr>
+          <p:cNvPr id="15" name="Image 2" descr="plug"/>
           <p:cNvPicPr>
             <a:picLocks noChangeAspect="1"/>
           </p:cNvPicPr>
           <p:nvPr/>
         </p:nvPicPr>
         <p:blipFill>
-          <a:blip r:embed="rId3"/>
+          <a:blip r:embed="rId5"/>
           <a:stretch>
             <a:fillRect/>
           </a:stretch>
@@ -4425,7 +4319,7 @@
           <a:bodyPr wrap="square" lIns="0" tIns="0" rIns="0" bIns="0" rtlCol="0" anchor="ctr"/>
           <a:lstStyle/>
           <a:p>
-            <a:pPr indent="0" marL="0">
+            <a:pPr marL="0" indent="0">
               <a:buNone/>
             </a:pPr>
             <a:r>
@@ -4461,7 +4355,7 @@
           <a:bodyPr wrap="square" lIns="0" tIns="0" rIns="0" bIns="0" rtlCol="0" anchor="t"/>
           <a:lstStyle/>
           <a:p>
-            <a:pPr indent="0" marL="0">
+            <a:pPr marL="0" indent="0">
               <a:buNone/>
             </a:pPr>
             <a:r>
@@ -4502,13 +4396,20 @@
             <a:prstDash val="solid"/>
           </a:ln>
           <a:effectLst>
-            <a:outerShdw sx="100000" sy="100000" kx="0" ky="0" algn="bl" rotWithShape="0" blurRad="101600" dist="25400" dir="5400000">
+            <a:outerShdw blurRad="101600" dist="25400" dir="5400000" algn="bl" rotWithShape="0">
               <a:srgbClr val="000000">
                 <a:alpha val="12000"/>
               </a:srgbClr>
             </a:outerShdw>
           </a:effectLst>
         </p:spPr>
+        <p:txBody>
+          <a:bodyPr/>
+          <a:lstStyle/>
+          <a:p>
+            <a:endParaRPr lang="hu-HU"/>
+          </a:p>
+        </p:txBody>
       </p:sp>
       <p:sp>
         <p:nvSpPr>
@@ -4534,17 +4435,24 @@
             <a:prstDash val="solid"/>
           </a:ln>
         </p:spPr>
+        <p:txBody>
+          <a:bodyPr/>
+          <a:lstStyle/>
+          <a:p>
+            <a:endParaRPr lang="hu-HU"/>
+          </a:p>
+        </p:txBody>
       </p:sp>
       <p:pic>
         <p:nvPicPr>
-          <p:cNvPr id="20" name="Image 3" descr="water">    </p:cNvPr>
+          <p:cNvPr id="20" name="Image 3" descr="water"/>
           <p:cNvPicPr>
             <a:picLocks noChangeAspect="1"/>
           </p:cNvPicPr>
           <p:nvPr/>
         </p:nvPicPr>
         <p:blipFill>
-          <a:blip r:embed="rId4"/>
+          <a:blip r:embed="rId6"/>
           <a:stretch>
             <a:fillRect/>
           </a:stretch>
@@ -4580,7 +4488,7 @@
           <a:bodyPr wrap="square" lIns="0" tIns="0" rIns="0" bIns="0" rtlCol="0" anchor="ctr"/>
           <a:lstStyle/>
           <a:p>
-            <a:pPr indent="0" marL="0">
+            <a:pPr marL="0" indent="0">
               <a:buNone/>
             </a:pPr>
             <a:r>
@@ -4616,7 +4524,7 @@
           <a:bodyPr wrap="square" lIns="0" tIns="0" rIns="0" bIns="0" rtlCol="0" anchor="t"/>
           <a:lstStyle/>
           <a:p>
-            <a:pPr indent="0" marL="0">
+            <a:pPr marL="0" indent="0">
               <a:buNone/>
             </a:pPr>
             <a:r>
@@ -4657,13 +4565,20 @@
             <a:prstDash val="solid"/>
           </a:ln>
           <a:effectLst>
-            <a:outerShdw sx="100000" sy="100000" kx="0" ky="0" algn="bl" rotWithShape="0" blurRad="101600" dist="25400" dir="5400000">
+            <a:outerShdw blurRad="101600" dist="25400" dir="5400000" algn="bl" rotWithShape="0">
               <a:srgbClr val="000000">
                 <a:alpha val="12000"/>
               </a:srgbClr>
             </a:outerShdw>
           </a:effectLst>
         </p:spPr>
+        <p:txBody>
+          <a:bodyPr/>
+          <a:lstStyle/>
+          <a:p>
+            <a:endParaRPr lang="hu-HU"/>
+          </a:p>
+        </p:txBody>
       </p:sp>
       <p:sp>
         <p:nvSpPr>
@@ -4689,17 +4604,24 @@
             <a:prstDash val="solid"/>
           </a:ln>
         </p:spPr>
+        <p:txBody>
+          <a:bodyPr/>
+          <a:lstStyle/>
+          <a:p>
+            <a:endParaRPr lang="hu-HU"/>
+          </a:p>
+        </p:txBody>
       </p:sp>
       <p:pic>
         <p:nvPicPr>
-          <p:cNvPr id="25" name="Image 4" descr="bug">    </p:cNvPr>
+          <p:cNvPr id="25" name="Image 4" descr="bug"/>
           <p:cNvPicPr>
             <a:picLocks noChangeAspect="1"/>
           </p:cNvPicPr>
           <p:nvPr/>
         </p:nvPicPr>
         <p:blipFill>
-          <a:blip r:embed="rId5"/>
+          <a:blip r:embed="rId7"/>
           <a:stretch>
             <a:fillRect/>
           </a:stretch>
@@ -4735,7 +4657,7 @@
           <a:bodyPr wrap="square" lIns="0" tIns="0" rIns="0" bIns="0" rtlCol="0" anchor="ctr"/>
           <a:lstStyle/>
           <a:p>
-            <a:pPr indent="0" marL="0">
+            <a:pPr marL="0" indent="0">
               <a:buNone/>
             </a:pPr>
             <a:r>
@@ -4771,7 +4693,7 @@
           <a:bodyPr wrap="square" lIns="0" tIns="0" rIns="0" bIns="0" rtlCol="0" anchor="t"/>
           <a:lstStyle/>
           <a:p>
-            <a:pPr indent="0" marL="0">
+            <a:pPr marL="0" indent="0">
               <a:buNone/>
             </a:pPr>
             <a:r>
@@ -4812,13 +4734,20 @@
             <a:prstDash val="solid"/>
           </a:ln>
           <a:effectLst>
-            <a:outerShdw sx="100000" sy="100000" kx="0" ky="0" algn="bl" rotWithShape="0" blurRad="101600" dist="25400" dir="5400000">
+            <a:outerShdw blurRad="101600" dist="25400" dir="5400000" algn="bl" rotWithShape="0">
               <a:srgbClr val="000000">
                 <a:alpha val="12000"/>
               </a:srgbClr>
             </a:outerShdw>
           </a:effectLst>
         </p:spPr>
+        <p:txBody>
+          <a:bodyPr/>
+          <a:lstStyle/>
+          <a:p>
+            <a:endParaRPr lang="hu-HU"/>
+          </a:p>
+        </p:txBody>
       </p:sp>
       <p:sp>
         <p:nvSpPr>
@@ -4844,17 +4773,24 @@
             <a:prstDash val="solid"/>
           </a:ln>
         </p:spPr>
+        <p:txBody>
+          <a:bodyPr/>
+          <a:lstStyle/>
+          <a:p>
+            <a:endParaRPr lang="hu-HU"/>
+          </a:p>
+        </p:txBody>
       </p:sp>
       <p:pic>
         <p:nvPicPr>
-          <p:cNvPr id="30" name="Image 5" descr="shield">    </p:cNvPr>
+          <p:cNvPr id="30" name="Image 5" descr="shield"/>
           <p:cNvPicPr>
             <a:picLocks noChangeAspect="1"/>
           </p:cNvPicPr>
           <p:nvPr/>
         </p:nvPicPr>
         <p:blipFill>
-          <a:blip r:embed="rId6"/>
+          <a:blip r:embed="rId8"/>
           <a:stretch>
             <a:fillRect/>
           </a:stretch>
@@ -4890,7 +4826,7 @@
           <a:bodyPr wrap="square" lIns="0" tIns="0" rIns="0" bIns="0" rtlCol="0" anchor="ctr"/>
           <a:lstStyle/>
           <a:p>
-            <a:pPr indent="0" marL="0">
+            <a:pPr marL="0" indent="0">
               <a:buNone/>
             </a:pPr>
             <a:r>
@@ -4926,7 +4862,7 @@
           <a:bodyPr wrap="square" lIns="0" tIns="0" rIns="0" bIns="0" rtlCol="0" anchor="t"/>
           <a:lstStyle/>
           <a:p>
-            <a:pPr indent="0" marL="0">
+            <a:pPr marL="0" indent="0">
               <a:buNone/>
             </a:pPr>
             <a:r>
@@ -4943,7 +4879,7 @@
       </p:sp>
       <p:sp>
         <p:nvSpPr>
-          <p:cNvPr id="25" name="Slide Number Placeholder 0"/>
+          <p:cNvPr id="33" name="Slide Number Placeholder 0"/>
           <p:cNvSpPr>
             <a:spLocks noGrp="1"/>
           </p:cNvSpPr>
@@ -4961,7 +4897,7 @@
           </a:prstGeom>
           <a:extLst>
             <a:ext uri="{C572A759-6A51-4108-AA02-DFA0A04FC94B}">
-              <ma14:wrappingTextBoxFlag xmlns:ma14="http://schemas.microsoft.com/office/mac/drawingml/2011/main" val="0"/>
+              <ma14:wrappingTextBoxFlag xmlns:ma14="http://schemas.microsoft.com/office/mac/drawingml/2011/main" xmlns="" val="0"/>
             </a:ext>
           </a:extLst>
         </p:spPr>
@@ -4979,7 +4915,7 @@
           <a:p>
             <a:pPr algn="r"/>
             <a:fld id="{F7021451-1387-4CA6-816F-3879F97B5CBC}" type="slidenum">
-              <a:rPr b="0" lang="en-US"/>
+              <a:rPr lang="en-US" b="0"/>
               <a:t>3</a:t>
             </a:fld>
             <a:endParaRPr lang="en-US"/>
@@ -5014,9 +4950,11 @@
       <p:sp>
         <p:nvSpPr>
           <p:cNvPr id="2" name="Text 0"/>
-          <p:cNvSpPr/>
+          <p:cNvSpPr>
+            <a:spLocks noGrp="1"/>
+          </p:cNvSpPr>
           <p:nvPr>
-            <p:ph idx="100" type="title" hasCustomPrompt="1"/>
+            <p:ph type="title" idx="100" hasCustomPrompt="1"/>
           </p:nvPr>
         </p:nvSpPr>
         <p:spPr>
@@ -5034,7 +4972,7 @@
           <a:bodyPr wrap="square" lIns="0" tIns="0" rIns="0" bIns="0" rtlCol="0" anchor="ctr"/>
           <a:lstStyle/>
           <a:p>
-            <a:pPr algn="l" indent="0" marL="0">
+            <a:pPr marL="0" indent="0" algn="l">
               <a:buNone/>
             </a:pPr>
             <a:r>
@@ -5065,16 +5003,34 @@
         </p:nvGraphicFramePr>
         <p:xfrm>
           <a:off x="548640" y="1143000"/>
-          <a:ext cx="8046720" cy="914400"/>
+          <a:ext cx="8046720" cy="2926080"/>
         </p:xfrm>
         <a:graphic>
           <a:graphicData uri="http://schemas.openxmlformats.org/drawingml/2006/table">
             <a:tbl>
               <a:tblPr/>
               <a:tblGrid>
-                <a:gridCol w="3840480"/>
-                <a:gridCol w="2377440"/>
-                <a:gridCol w="1828800"/>
+                <a:gridCol w="3840480">
+                  <a:extLst>
+                    <a:ext uri="{9D8B030D-6E8A-4147-A177-3AD203B41FA5}">
+                      <a16:colId xmlns:a16="http://schemas.microsoft.com/office/drawing/2014/main" val="20000"/>
+                    </a:ext>
+                  </a:extLst>
+                </a:gridCol>
+                <a:gridCol w="2377440">
+                  <a:extLst>
+                    <a:ext uri="{9D8B030D-6E8A-4147-A177-3AD203B41FA5}">
+                      <a16:colId xmlns:a16="http://schemas.microsoft.com/office/drawing/2014/main" val="20001"/>
+                    </a:ext>
+                  </a:extLst>
+                </a:gridCol>
+                <a:gridCol w="1828800">
+                  <a:extLst>
+                    <a:ext uri="{9D8B030D-6E8A-4147-A177-3AD203B41FA5}">
+                      <a16:colId xmlns:a16="http://schemas.microsoft.com/office/drawing/2014/main" val="20002"/>
+                    </a:ext>
+                  </a:extLst>
+                </a:gridCol>
               </a:tblGrid>
               <a:tr h="365760">
                 <a:tc>
@@ -5082,7 +5038,7 @@
                     <a:bodyPr/>
                     <a:lstStyle/>
                     <a:p>
-                      <a:pPr indent="0" marL="0">
+                      <a:pPr marL="0" indent="0">
                         <a:buNone/>
                       </a:pPr>
                       <a:endParaRPr lang="en-US" sz="1200" dirty="0"/>
@@ -5108,7 +5064,7 @@
                     <a:bodyPr/>
                     <a:lstStyle/>
                     <a:p>
-                      <a:pPr indent="0" marL="0">
+                      <a:pPr marL="0" indent="0">
                         <a:buNone/>
                       </a:pPr>
                       <a:endParaRPr lang="en-US" sz="1200" dirty="0"/>
@@ -5134,7 +5090,7 @@
                     <a:bodyPr/>
                     <a:lstStyle/>
                     <a:p>
-                      <a:pPr indent="0" marL="0">
+                      <a:pPr marL="0" indent="0">
                         <a:buNone/>
                       </a:pPr>
                       <a:endParaRPr lang="en-US" sz="1200" dirty="0"/>
@@ -5155,6 +5111,11 @@
                     </a:lnB>
                   </a:tcPr>
                 </a:tc>
+                <a:extLst>
+                  <a:ext uri="{0D108BD9-81ED-4DB2-BD59-A6C34878D82A}">
+                    <a16:rowId xmlns:a16="http://schemas.microsoft.com/office/drawing/2014/main" val="10000"/>
+                  </a:ext>
+                </a:extLst>
               </a:tr>
               <a:tr h="365760">
                 <a:tc>
@@ -5162,7 +5123,7 @@
                     <a:bodyPr/>
                     <a:lstStyle/>
                     <a:p>
-                      <a:pPr algn="l" indent="0" marL="0">
+                      <a:pPr marL="0" indent="0" algn="l">
                         <a:buNone/>
                       </a:pPr>
                       <a:r>
@@ -5199,7 +5160,7 @@
                     <a:bodyPr/>
                     <a:lstStyle/>
                     <a:p>
-                      <a:pPr algn="r" indent="0" marL="0">
+                      <a:pPr marL="0" indent="0" algn="r">
                         <a:buNone/>
                       </a:pPr>
                       <a:r>
@@ -5236,7 +5197,7 @@
                     <a:bodyPr/>
                     <a:lstStyle/>
                     <a:p>
-                      <a:pPr algn="r" indent="0" marL="0">
+                      <a:pPr marL="0" indent="0" algn="r">
                         <a:buNone/>
                       </a:pPr>
                       <a:r>
@@ -5268,6 +5229,11 @@
                     </a:solidFill>
                   </a:tcPr>
                 </a:tc>
+                <a:extLst>
+                  <a:ext uri="{0D108BD9-81ED-4DB2-BD59-A6C34878D82A}">
+                    <a16:rowId xmlns:a16="http://schemas.microsoft.com/office/drawing/2014/main" val="10001"/>
+                  </a:ext>
+                </a:extLst>
               </a:tr>
               <a:tr h="365760">
                 <a:tc>
@@ -5275,7 +5241,7 @@
                     <a:bodyPr/>
                     <a:lstStyle/>
                     <a:p>
-                      <a:pPr algn="l" indent="0" marL="0">
+                      <a:pPr marL="0" indent="0" algn="l">
                         <a:buNone/>
                       </a:pPr>
                       <a:r>
@@ -5312,7 +5278,7 @@
                     <a:bodyPr/>
                     <a:lstStyle/>
                     <a:p>
-                      <a:pPr algn="r" indent="0" marL="0">
+                      <a:pPr marL="0" indent="0" algn="r">
                         <a:buNone/>
                       </a:pPr>
                       <a:r>
@@ -5349,7 +5315,7 @@
                     <a:bodyPr/>
                     <a:lstStyle/>
                     <a:p>
-                      <a:pPr algn="r" indent="0" marL="0">
+                      <a:pPr marL="0" indent="0" algn="r">
                         <a:buNone/>
                       </a:pPr>
                       <a:r>
@@ -5381,6 +5347,11 @@
                     </a:solidFill>
                   </a:tcPr>
                 </a:tc>
+                <a:extLst>
+                  <a:ext uri="{0D108BD9-81ED-4DB2-BD59-A6C34878D82A}">
+                    <a16:rowId xmlns:a16="http://schemas.microsoft.com/office/drawing/2014/main" val="10002"/>
+                  </a:ext>
+                </a:extLst>
               </a:tr>
               <a:tr h="365760">
                 <a:tc>
@@ -5388,7 +5359,7 @@
                     <a:bodyPr/>
                     <a:lstStyle/>
                     <a:p>
-                      <a:pPr algn="l" indent="0" marL="0">
+                      <a:pPr marL="0" indent="0" algn="l">
                         <a:buNone/>
                       </a:pPr>
                       <a:r>
@@ -5425,7 +5396,7 @@
                     <a:bodyPr/>
                     <a:lstStyle/>
                     <a:p>
-                      <a:pPr algn="r" indent="0" marL="0">
+                      <a:pPr marL="0" indent="0" algn="r">
                         <a:buNone/>
                       </a:pPr>
                       <a:r>
@@ -5462,7 +5433,7 @@
                     <a:bodyPr/>
                     <a:lstStyle/>
                     <a:p>
-                      <a:pPr algn="r" indent="0" marL="0">
+                      <a:pPr marL="0" indent="0" algn="r">
                         <a:buNone/>
                       </a:pPr>
                       <a:r>
@@ -5494,6 +5465,11 @@
                     </a:solidFill>
                   </a:tcPr>
                 </a:tc>
+                <a:extLst>
+                  <a:ext uri="{0D108BD9-81ED-4DB2-BD59-A6C34878D82A}">
+                    <a16:rowId xmlns:a16="http://schemas.microsoft.com/office/drawing/2014/main" val="10003"/>
+                  </a:ext>
+                </a:extLst>
               </a:tr>
               <a:tr h="365760">
                 <a:tc>
@@ -5501,7 +5477,7 @@
                     <a:bodyPr/>
                     <a:lstStyle/>
                     <a:p>
-                      <a:pPr algn="l" indent="0" marL="0">
+                      <a:pPr marL="0" indent="0" algn="l">
                         <a:buNone/>
                       </a:pPr>
                       <a:r>
@@ -5538,7 +5514,7 @@
                     <a:bodyPr/>
                     <a:lstStyle/>
                     <a:p>
-                      <a:pPr algn="r" indent="0" marL="0">
+                      <a:pPr marL="0" indent="0" algn="r">
                         <a:buNone/>
                       </a:pPr>
                       <a:r>
@@ -5575,7 +5551,7 @@
                     <a:bodyPr/>
                     <a:lstStyle/>
                     <a:p>
-                      <a:pPr algn="r" indent="0" marL="0">
+                      <a:pPr marL="0" indent="0" algn="r">
                         <a:buNone/>
                       </a:pPr>
                       <a:r>
@@ -5607,6 +5583,11 @@
                     </a:solidFill>
                   </a:tcPr>
                 </a:tc>
+                <a:extLst>
+                  <a:ext uri="{0D108BD9-81ED-4DB2-BD59-A6C34878D82A}">
+                    <a16:rowId xmlns:a16="http://schemas.microsoft.com/office/drawing/2014/main" val="10004"/>
+                  </a:ext>
+                </a:extLst>
               </a:tr>
               <a:tr h="365760">
                 <a:tc>
@@ -5614,7 +5595,7 @@
                     <a:bodyPr/>
                     <a:lstStyle/>
                     <a:p>
-                      <a:pPr algn="l" indent="0" marL="0">
+                      <a:pPr marL="0" indent="0" algn="l">
                         <a:buNone/>
                       </a:pPr>
                       <a:r>
@@ -5651,7 +5632,7 @@
                     <a:bodyPr/>
                     <a:lstStyle/>
                     <a:p>
-                      <a:pPr algn="r" indent="0" marL="0">
+                      <a:pPr marL="0" indent="0" algn="r">
                         <a:buNone/>
                       </a:pPr>
                       <a:r>
@@ -5688,7 +5669,7 @@
                     <a:bodyPr/>
                     <a:lstStyle/>
                     <a:p>
-                      <a:pPr algn="r" indent="0" marL="0">
+                      <a:pPr marL="0" indent="0" algn="r">
                         <a:buNone/>
                       </a:pPr>
                       <a:r>
@@ -5720,6 +5701,11 @@
                     </a:solidFill>
                   </a:tcPr>
                 </a:tc>
+                <a:extLst>
+                  <a:ext uri="{0D108BD9-81ED-4DB2-BD59-A6C34878D82A}">
+                    <a16:rowId xmlns:a16="http://schemas.microsoft.com/office/drawing/2014/main" val="10005"/>
+                  </a:ext>
+                </a:extLst>
               </a:tr>
               <a:tr h="365760">
                 <a:tc>
@@ -5727,7 +5713,7 @@
                     <a:bodyPr/>
                     <a:lstStyle/>
                     <a:p>
-                      <a:pPr algn="l" indent="0" marL="0">
+                      <a:pPr marL="0" indent="0" algn="l">
                         <a:buNone/>
                       </a:pPr>
                       <a:r>
@@ -5764,7 +5750,7 @@
                     <a:bodyPr/>
                     <a:lstStyle/>
                     <a:p>
-                      <a:pPr algn="r" indent="0" marL="0">
+                      <a:pPr marL="0" indent="0" algn="r">
                         <a:buNone/>
                       </a:pPr>
                       <a:r>
@@ -5801,7 +5787,7 @@
                     <a:bodyPr/>
                     <a:lstStyle/>
                     <a:p>
-                      <a:pPr algn="r" indent="0" marL="0">
+                      <a:pPr marL="0" indent="0" algn="r">
                         <a:buNone/>
                       </a:pPr>
                       <a:r>
@@ -5833,6 +5819,11 @@
                     </a:solidFill>
                   </a:tcPr>
                 </a:tc>
+                <a:extLst>
+                  <a:ext uri="{0D108BD9-81ED-4DB2-BD59-A6C34878D82A}">
+                    <a16:rowId xmlns:a16="http://schemas.microsoft.com/office/drawing/2014/main" val="10006"/>
+                  </a:ext>
+                </a:extLst>
               </a:tr>
               <a:tr h="365760">
                 <a:tc>
@@ -5840,7 +5831,7 @@
                     <a:bodyPr/>
                     <a:lstStyle/>
                     <a:p>
-                      <a:pPr algn="l" indent="0" marL="0">
+                      <a:pPr marL="0" indent="0" algn="l">
                         <a:buNone/>
                       </a:pPr>
                       <a:r>
@@ -5877,7 +5868,7 @@
                     <a:bodyPr/>
                     <a:lstStyle/>
                     <a:p>
-                      <a:pPr algn="r" indent="0" marL="0">
+                      <a:pPr marL="0" indent="0" algn="r">
                         <a:buNone/>
                       </a:pPr>
                       <a:r>
@@ -5914,7 +5905,7 @@
                     <a:bodyPr/>
                     <a:lstStyle/>
                     <a:p>
-                      <a:pPr algn="r" indent="0" marL="0">
+                      <a:pPr marL="0" indent="0" algn="r">
                         <a:buNone/>
                       </a:pPr>
                       <a:r>
@@ -5946,6 +5937,11 @@
                     </a:solidFill>
                   </a:tcPr>
                 </a:tc>
+                <a:extLst>
+                  <a:ext uri="{0D108BD9-81ED-4DB2-BD59-A6C34878D82A}">
+                    <a16:rowId xmlns:a16="http://schemas.microsoft.com/office/drawing/2014/main" val="10007"/>
+                  </a:ext>
+                </a:extLst>
               </a:tr>
             </a:tbl>
           </a:graphicData>
@@ -5972,7 +5968,7 @@
           <a:bodyPr wrap="square" lIns="0" tIns="0" rIns="0" bIns="0" rtlCol="0" anchor="ctr"/>
           <a:lstStyle/>
           <a:p>
-            <a:pPr indent="0" marL="0">
+            <a:pPr marL="0" indent="0">
               <a:buNone/>
             </a:pPr>
             <a:r>
@@ -6007,7 +6003,7 @@
           </a:prstGeom>
           <a:extLst>
             <a:ext uri="{C572A759-6A51-4108-AA02-DFA0A04FC94B}">
-              <ma14:wrappingTextBoxFlag xmlns:ma14="http://schemas.microsoft.com/office/mac/drawingml/2011/main" val="0"/>
+              <ma14:wrappingTextBoxFlag xmlns:ma14="http://schemas.microsoft.com/office/mac/drawingml/2011/main" xmlns="" val="0"/>
             </a:ext>
           </a:extLst>
         </p:spPr>
@@ -6025,7 +6021,7 @@
           <a:p>
             <a:pPr algn="r"/>
             <a:fld id="{F7021451-1387-4CA6-816F-3879F97B5CBC}" type="slidenum">
-              <a:rPr b="0" lang="en-US"/>
+              <a:rPr lang="en-US" b="0"/>
               <a:t>4</a:t>
             </a:fld>
             <a:endParaRPr lang="en-US"/>
@@ -6060,9 +6056,11 @@
       <p:sp>
         <p:nvSpPr>
           <p:cNvPr id="2" name="Text 0"/>
-          <p:cNvSpPr/>
+          <p:cNvSpPr>
+            <a:spLocks noGrp="1"/>
+          </p:cNvSpPr>
           <p:nvPr>
-            <p:ph idx="100" type="title" hasCustomPrompt="1"/>
+            <p:ph type="title" idx="100" hasCustomPrompt="1"/>
           </p:nvPr>
         </p:nvSpPr>
         <p:spPr>
@@ -6080,7 +6078,7 @@
           <a:bodyPr wrap="square" lIns="0" tIns="0" rIns="0" bIns="0" rtlCol="0" anchor="ctr"/>
           <a:lstStyle/>
           <a:p>
-            <a:pPr algn="l" indent="0" marL="0">
+            <a:pPr marL="0" indent="0" algn="l">
               <a:buNone/>
             </a:pPr>
             <a:r>
@@ -6121,13 +6119,20 @@
             <a:prstDash val="solid"/>
           </a:ln>
           <a:effectLst>
-            <a:outerShdw sx="100000" sy="100000" kx="0" ky="0" algn="bl" rotWithShape="0" blurRad="101600" dist="25400" dir="5400000">
+            <a:outerShdw blurRad="101600" dist="25400" dir="5400000" algn="bl" rotWithShape="0">
               <a:srgbClr val="000000">
                 <a:alpha val="12000"/>
               </a:srgbClr>
             </a:outerShdw>
           </a:effectLst>
         </p:spPr>
+        <p:txBody>
+          <a:bodyPr/>
+          <a:lstStyle/>
+          <a:p>
+            <a:endParaRPr lang="hu-HU"/>
+          </a:p>
+        </p:txBody>
       </p:sp>
       <p:sp>
         <p:nvSpPr>
@@ -6153,17 +6158,24 @@
             <a:prstDash val="solid"/>
           </a:ln>
         </p:spPr>
+        <p:txBody>
+          <a:bodyPr/>
+          <a:lstStyle/>
+          <a:p>
+            <a:endParaRPr lang="hu-HU"/>
+          </a:p>
+        </p:txBody>
       </p:sp>
       <p:pic>
         <p:nvPicPr>
-          <p:cNvPr id="5" name="Image 0" descr="mobile">    </p:cNvPr>
+          <p:cNvPr id="5" name="Image 0" descr="mobile"/>
           <p:cNvPicPr>
             <a:picLocks noChangeAspect="1"/>
           </p:cNvPicPr>
           <p:nvPr/>
         </p:nvPicPr>
         <p:blipFill>
-          <a:blip r:embed="rId1"/>
+          <a:blip r:embed="rId3"/>
           <a:stretch>
             <a:fillRect/>
           </a:stretch>
@@ -6199,7 +6211,7 @@
           <a:bodyPr wrap="square" lIns="0" tIns="0" rIns="0" bIns="0" rtlCol="0" anchor="ctr"/>
           <a:lstStyle/>
           <a:p>
-            <a:pPr algn="ctr" indent="0" marL="0">
+            <a:pPr marL="0" indent="0" algn="ctr">
               <a:buNone/>
             </a:pPr>
             <a:r>
@@ -6235,7 +6247,7 @@
           <a:bodyPr wrap="square" lIns="0" tIns="0" rIns="0" bIns="0" rtlCol="0" anchor="t"/>
           <a:lstStyle/>
           <a:p>
-            <a:pPr indent="0" marL="0">
+            <a:pPr marL="0" indent="0">
               <a:buNone/>
             </a:pPr>
             <a:r>
@@ -6276,13 +6288,20 @@
             <a:prstDash val="solid"/>
           </a:ln>
           <a:effectLst>
-            <a:outerShdw sx="100000" sy="100000" kx="0" ky="0" algn="bl" rotWithShape="0" blurRad="101600" dist="25400" dir="5400000">
+            <a:outerShdw blurRad="101600" dist="25400" dir="5400000" algn="bl" rotWithShape="0">
               <a:srgbClr val="000000">
                 <a:alpha val="12000"/>
               </a:srgbClr>
             </a:outerShdw>
           </a:effectLst>
         </p:spPr>
+        <p:txBody>
+          <a:bodyPr/>
+          <a:lstStyle/>
+          <a:p>
+            <a:endParaRPr lang="hu-HU"/>
+          </a:p>
+        </p:txBody>
       </p:sp>
       <p:sp>
         <p:nvSpPr>
@@ -6308,17 +6327,24 @@
             <a:prstDash val="solid"/>
           </a:ln>
         </p:spPr>
+        <p:txBody>
+          <a:bodyPr/>
+          <a:lstStyle/>
+          <a:p>
+            <a:endParaRPr lang="hu-HU"/>
+          </a:p>
+        </p:txBody>
       </p:sp>
       <p:pic>
         <p:nvPicPr>
-          <p:cNvPr id="10" name="Image 1" descr="wrench">    </p:cNvPr>
+          <p:cNvPr id="10" name="Image 1" descr="wrench"/>
           <p:cNvPicPr>
             <a:picLocks noChangeAspect="1"/>
           </p:cNvPicPr>
           <p:nvPr/>
         </p:nvPicPr>
         <p:blipFill>
-          <a:blip r:embed="rId2"/>
+          <a:blip r:embed="rId4"/>
           <a:stretch>
             <a:fillRect/>
           </a:stretch>
@@ -6354,7 +6380,7 @@
           <a:bodyPr wrap="square" lIns="0" tIns="0" rIns="0" bIns="0" rtlCol="0" anchor="ctr"/>
           <a:lstStyle/>
           <a:p>
-            <a:pPr algn="ctr" indent="0" marL="0">
+            <a:pPr marL="0" indent="0" algn="ctr">
               <a:buNone/>
             </a:pPr>
             <a:r>
@@ -6390,7 +6416,7 @@
           <a:bodyPr wrap="square" lIns="0" tIns="0" rIns="0" bIns="0" rtlCol="0" anchor="t"/>
           <a:lstStyle/>
           <a:p>
-            <a:pPr indent="0" marL="0">
+            <a:pPr marL="0" indent="0">
               <a:buNone/>
             </a:pPr>
             <a:r>
@@ -6431,13 +6457,20 @@
             <a:prstDash val="solid"/>
           </a:ln>
           <a:effectLst>
-            <a:outerShdw sx="100000" sy="100000" kx="0" ky="0" algn="bl" rotWithShape="0" blurRad="101600" dist="25400" dir="5400000">
+            <a:outerShdw blurRad="101600" dist="25400" dir="5400000" algn="bl" rotWithShape="0">
               <a:srgbClr val="000000">
                 <a:alpha val="12000"/>
               </a:srgbClr>
             </a:outerShdw>
           </a:effectLst>
         </p:spPr>
+        <p:txBody>
+          <a:bodyPr/>
+          <a:lstStyle/>
+          <a:p>
+            <a:endParaRPr lang="hu-HU"/>
+          </a:p>
+        </p:txBody>
       </p:sp>
       <p:sp>
         <p:nvSpPr>
@@ -6463,17 +6496,24 @@
             <a:prstDash val="solid"/>
           </a:ln>
         </p:spPr>
+        <p:txBody>
+          <a:bodyPr/>
+          <a:lstStyle/>
+          <a:p>
+            <a:endParaRPr lang="hu-HU"/>
+          </a:p>
+        </p:txBody>
       </p:sp>
       <p:pic>
         <p:nvPicPr>
-          <p:cNvPr id="15" name="Image 2" descr="tools">    </p:cNvPr>
+          <p:cNvPr id="15" name="Image 2" descr="tools"/>
           <p:cNvPicPr>
             <a:picLocks noChangeAspect="1"/>
           </p:cNvPicPr>
           <p:nvPr/>
         </p:nvPicPr>
         <p:blipFill>
-          <a:blip r:embed="rId3"/>
+          <a:blip r:embed="rId5"/>
           <a:stretch>
             <a:fillRect/>
           </a:stretch>
@@ -6509,7 +6549,7 @@
           <a:bodyPr wrap="square" lIns="0" tIns="0" rIns="0" bIns="0" rtlCol="0" anchor="ctr"/>
           <a:lstStyle/>
           <a:p>
-            <a:pPr algn="ctr" indent="0" marL="0">
+            <a:pPr marL="0" indent="0" algn="ctr">
               <a:buNone/>
             </a:pPr>
             <a:r>
@@ -6545,7 +6585,7 @@
           <a:bodyPr wrap="square" lIns="0" tIns="0" rIns="0" bIns="0" rtlCol="0" anchor="t"/>
           <a:lstStyle/>
           <a:p>
-            <a:pPr indent="0" marL="0">
+            <a:pPr marL="0" indent="0">
               <a:buNone/>
             </a:pPr>
             <a:r>
@@ -6586,13 +6626,20 @@
             <a:prstDash val="solid"/>
           </a:ln>
           <a:effectLst>
-            <a:outerShdw sx="100000" sy="100000" kx="0" ky="0" algn="bl" rotWithShape="0" blurRad="101600" dist="25400" dir="5400000">
+            <a:outerShdw blurRad="101600" dist="25400" dir="5400000" algn="bl" rotWithShape="0">
               <a:srgbClr val="000000">
                 <a:alpha val="12000"/>
               </a:srgbClr>
             </a:outerShdw>
           </a:effectLst>
         </p:spPr>
+        <p:txBody>
+          <a:bodyPr/>
+          <a:lstStyle/>
+          <a:p>
+            <a:endParaRPr lang="hu-HU"/>
+          </a:p>
+        </p:txBody>
       </p:sp>
       <p:sp>
         <p:nvSpPr>
@@ -6618,17 +6665,24 @@
             <a:prstDash val="solid"/>
           </a:ln>
         </p:spPr>
+        <p:txBody>
+          <a:bodyPr/>
+          <a:lstStyle/>
+          <a:p>
+            <a:endParaRPr lang="hu-HU"/>
+          </a:p>
+        </p:txBody>
       </p:sp>
       <p:pic>
         <p:nvPicPr>
-          <p:cNvPr id="20" name="Image 3" descr="check">    </p:cNvPr>
+          <p:cNvPr id="20" name="Image 3" descr="check"/>
           <p:cNvPicPr>
             <a:picLocks noChangeAspect="1"/>
           </p:cNvPicPr>
           <p:nvPr/>
         </p:nvPicPr>
         <p:blipFill>
-          <a:blip r:embed="rId4"/>
+          <a:blip r:embed="rId6"/>
           <a:stretch>
             <a:fillRect/>
           </a:stretch>
@@ -6664,7 +6718,7 @@
           <a:bodyPr wrap="square" lIns="0" tIns="0" rIns="0" bIns="0" rtlCol="0" anchor="ctr"/>
           <a:lstStyle/>
           <a:p>
-            <a:pPr algn="ctr" indent="0" marL="0">
+            <a:pPr marL="0" indent="0" algn="ctr">
               <a:buNone/>
             </a:pPr>
             <a:r>
@@ -6700,7 +6754,7 @@
           <a:bodyPr wrap="square" lIns="0" tIns="0" rIns="0" bIns="0" rtlCol="0" anchor="t"/>
           <a:lstStyle/>
           <a:p>
-            <a:pPr indent="0" marL="0">
+            <a:pPr marL="0" indent="0">
               <a:buNone/>
             </a:pPr>
             <a:r>
@@ -6735,7 +6789,7 @@
           </a:prstGeom>
           <a:extLst>
             <a:ext uri="{C572A759-6A51-4108-AA02-DFA0A04FC94B}">
-              <ma14:wrappingTextBoxFlag xmlns:ma14="http://schemas.microsoft.com/office/mac/drawingml/2011/main" val="0"/>
+              <ma14:wrappingTextBoxFlag xmlns:ma14="http://schemas.microsoft.com/office/mac/drawingml/2011/main" xmlns="" val="0"/>
             </a:ext>
           </a:extLst>
         </p:spPr>
@@ -6753,7 +6807,7 @@
           <a:p>
             <a:pPr algn="r"/>
             <a:fld id="{F7021451-1387-4CA6-816F-3879F97B5CBC}" type="slidenum">
-              <a:rPr b="0" lang="en-US"/>
+              <a:rPr lang="en-US" b="0"/>
               <a:t>5</a:t>
             </a:fld>
             <a:endParaRPr lang="en-US"/>
@@ -6788,9 +6842,11 @@
       <p:sp>
         <p:nvSpPr>
           <p:cNvPr id="2" name="Text 0"/>
-          <p:cNvSpPr/>
+          <p:cNvSpPr>
+            <a:spLocks noGrp="1"/>
+          </p:cNvSpPr>
           <p:nvPr>
-            <p:ph idx="100" type="title" hasCustomPrompt="1"/>
+            <p:ph type="title" idx="100" hasCustomPrompt="1"/>
           </p:nvPr>
         </p:nvSpPr>
         <p:spPr>
@@ -6808,7 +6864,7 @@
           <a:bodyPr wrap="square" lIns="0" tIns="0" rIns="0" bIns="0" rtlCol="0" anchor="ctr"/>
           <a:lstStyle/>
           <a:p>
-            <a:pPr algn="l" indent="0" marL="0">
+            <a:pPr marL="0" indent="0" algn="l">
               <a:buNone/>
             </a:pPr>
             <a:r>
@@ -6847,17 +6903,24 @@
             <a:prstDash val="solid"/>
           </a:ln>
         </p:spPr>
+        <p:txBody>
+          <a:bodyPr/>
+          <a:lstStyle/>
+          <a:p>
+            <a:endParaRPr lang="hu-HU"/>
+          </a:p>
+        </p:txBody>
       </p:sp>
       <p:pic>
         <p:nvPicPr>
-          <p:cNvPr id="4" name="Image 0" descr="clock">    </p:cNvPr>
+          <p:cNvPr id="4" name="Image 0" descr="clock"/>
           <p:cNvPicPr>
             <a:picLocks noChangeAspect="1"/>
           </p:cNvPicPr>
           <p:nvPr/>
         </p:nvPicPr>
         <p:blipFill>
-          <a:blip r:embed="rId1"/>
+          <a:blip r:embed="rId3"/>
           <a:stretch>
             <a:fillRect/>
           </a:stretch>
@@ -6893,7 +6956,7 @@
           <a:bodyPr wrap="square" lIns="0" tIns="0" rIns="0" bIns="0" rtlCol="0" anchor="ctr"/>
           <a:lstStyle/>
           <a:p>
-            <a:pPr indent="0" marL="0">
+            <a:pPr marL="0" indent="0">
               <a:buNone/>
             </a:pPr>
             <a:r>
@@ -6929,7 +6992,7 @@
           <a:bodyPr wrap="square" lIns="0" tIns="0" rIns="0" bIns="0" rtlCol="0" anchor="t"/>
           <a:lstStyle/>
           <a:p>
-            <a:pPr indent="0" marL="0">
+            <a:pPr marL="0" indent="0">
               <a:buNone/>
             </a:pPr>
             <a:r>
@@ -6968,17 +7031,24 @@
             <a:prstDash val="solid"/>
           </a:ln>
         </p:spPr>
+        <p:txBody>
+          <a:bodyPr/>
+          <a:lstStyle/>
+          <a:p>
+            <a:endParaRPr lang="hu-HU"/>
+          </a:p>
+        </p:txBody>
       </p:sp>
       <p:pic>
         <p:nvPicPr>
-          <p:cNvPr id="8" name="Image 1" descr="shield">    </p:cNvPr>
+          <p:cNvPr id="8" name="Image 1" descr="shield"/>
           <p:cNvPicPr>
             <a:picLocks noChangeAspect="1"/>
           </p:cNvPicPr>
           <p:nvPr/>
         </p:nvPicPr>
         <p:blipFill>
-          <a:blip r:embed="rId2"/>
+          <a:blip r:embed="rId4"/>
           <a:stretch>
             <a:fillRect/>
           </a:stretch>
@@ -7014,7 +7084,7 @@
           <a:bodyPr wrap="square" lIns="0" tIns="0" rIns="0" bIns="0" rtlCol="0" anchor="ctr"/>
           <a:lstStyle/>
           <a:p>
-            <a:pPr indent="0" marL="0">
+            <a:pPr marL="0" indent="0">
               <a:buNone/>
             </a:pPr>
             <a:r>
@@ -7050,7 +7120,7 @@
           <a:bodyPr wrap="square" lIns="0" tIns="0" rIns="0" bIns="0" rtlCol="0" anchor="t"/>
           <a:lstStyle/>
           <a:p>
-            <a:pPr indent="0" marL="0">
+            <a:pPr marL="0" indent="0">
               <a:buNone/>
             </a:pPr>
             <a:r>
@@ -7089,17 +7159,24 @@
             <a:prstDash val="solid"/>
           </a:ln>
         </p:spPr>
+        <p:txBody>
+          <a:bodyPr/>
+          <a:lstStyle/>
+          <a:p>
+            <a:endParaRPr lang="hu-HU"/>
+          </a:p>
+        </p:txBody>
       </p:sp>
       <p:pic>
         <p:nvPicPr>
-          <p:cNvPr id="12" name="Image 2" descr="users">    </p:cNvPr>
+          <p:cNvPr id="12" name="Image 2" descr="users"/>
           <p:cNvPicPr>
             <a:picLocks noChangeAspect="1"/>
           </p:cNvPicPr>
           <p:nvPr/>
         </p:nvPicPr>
         <p:blipFill>
-          <a:blip r:embed="rId3"/>
+          <a:blip r:embed="rId5"/>
           <a:stretch>
             <a:fillRect/>
           </a:stretch>
@@ -7135,7 +7212,7 @@
           <a:bodyPr wrap="square" lIns="0" tIns="0" rIns="0" bIns="0" rtlCol="0" anchor="ctr"/>
           <a:lstStyle/>
           <a:p>
-            <a:pPr indent="0" marL="0">
+            <a:pPr marL="0" indent="0">
               <a:buNone/>
             </a:pPr>
             <a:r>
@@ -7171,7 +7248,7 @@
           <a:bodyPr wrap="square" lIns="0" tIns="0" rIns="0" bIns="0" rtlCol="0" anchor="t"/>
           <a:lstStyle/>
           <a:p>
-            <a:pPr indent="0" marL="0">
+            <a:pPr marL="0" indent="0">
               <a:buNone/>
             </a:pPr>
             <a:r>
@@ -7212,6 +7289,13 @@
             <a:prstDash val="solid"/>
           </a:ln>
         </p:spPr>
+        <p:txBody>
+          <a:bodyPr/>
+          <a:lstStyle/>
+          <a:p>
+            <a:endParaRPr lang="hu-HU"/>
+          </a:p>
+        </p:txBody>
       </p:sp>
       <p:sp>
         <p:nvSpPr>
@@ -7234,7 +7318,7 @@
           <a:bodyPr wrap="square" lIns="0" tIns="0" rIns="0" bIns="0" rtlCol="0" anchor="ctr"/>
           <a:lstStyle/>
           <a:p>
-            <a:pPr indent="0" marL="0">
+            <a:pPr marL="0" indent="0">
               <a:buNone/>
             </a:pPr>
             <a:r>
@@ -7345,7 +7429,7 @@
           </a:prstGeom>
           <a:extLst>
             <a:ext uri="{C572A759-6A51-4108-AA02-DFA0A04FC94B}">
-              <ma14:wrappingTextBoxFlag xmlns:ma14="http://schemas.microsoft.com/office/mac/drawingml/2011/main" val="0"/>
+              <ma14:wrappingTextBoxFlag xmlns:ma14="http://schemas.microsoft.com/office/mac/drawingml/2011/main" xmlns="" val="0"/>
             </a:ext>
           </a:extLst>
         </p:spPr>
@@ -7363,7 +7447,7 @@
           <a:p>
             <a:pPr algn="r"/>
             <a:fld id="{F7021451-1387-4CA6-816F-3879F97B5CBC}" type="slidenum">
-              <a:rPr b="0" lang="en-US"/>
+              <a:rPr lang="en-US" b="0"/>
               <a:t>6</a:t>
             </a:fld>
             <a:endParaRPr lang="en-US"/>
@@ -7398,9 +7482,11 @@
       <p:sp>
         <p:nvSpPr>
           <p:cNvPr id="2" name="Text 0"/>
-          <p:cNvSpPr/>
+          <p:cNvSpPr>
+            <a:spLocks noGrp="1"/>
+          </p:cNvSpPr>
           <p:nvPr>
-            <p:ph idx="100" type="title" hasCustomPrompt="1"/>
+            <p:ph type="title" idx="100" hasCustomPrompt="1"/>
           </p:nvPr>
         </p:nvSpPr>
         <p:spPr>
@@ -7418,7 +7504,7 @@
           <a:bodyPr wrap="square" lIns="0" tIns="0" rIns="0" bIns="0" rtlCol="0" anchor="ctr"/>
           <a:lstStyle/>
           <a:p>
-            <a:pPr algn="l" indent="0" marL="0">
+            <a:pPr marL="0" indent="0" algn="l">
               <a:buNone/>
             </a:pPr>
             <a:r>
@@ -7459,10 +7545,17 @@
             <a:prstDash val="solid"/>
           </a:ln>
         </p:spPr>
+        <p:txBody>
+          <a:bodyPr/>
+          <a:lstStyle/>
+          <a:p>
+            <a:endParaRPr lang="hu-HU"/>
+          </a:p>
+        </p:txBody>
       </p:sp>
       <p:graphicFrame>
         <p:nvGraphicFramePr>
-          <p:cNvPr id="4" name="Chart 0" descr=""/>
+          <p:cNvPr id="4" name="Chart 0"/>
           <p:cNvGraphicFramePr/>
           <p:nvPr/>
         </p:nvGraphicFramePr>
@@ -7470,9 +7563,9 @@
           <a:off x="548640" y="1143000"/>
           <a:ext cx="4846320" cy="3429000"/>
         </p:xfrm>
-        <a:graphic xmlns:a="http://schemas.openxmlformats.org/drawingml/2006/main">
+        <a:graphic>
           <a:graphicData uri="http://schemas.openxmlformats.org/drawingml/2006/chart">
-            <c:chart xmlns:c="http://schemas.openxmlformats.org/drawingml/2006/chart" r:id="rId1"/>
+            <c:chart xmlns:c="http://schemas.openxmlformats.org/drawingml/2006/chart" xmlns:r="http://schemas.openxmlformats.org/officeDocument/2006/relationships" r:id="rId3"/>
           </a:graphicData>
         </a:graphic>
       </p:graphicFrame>
@@ -7502,10 +7595,17 @@
             <a:prstDash val="solid"/>
           </a:ln>
         </p:spPr>
+        <p:txBody>
+          <a:bodyPr/>
+          <a:lstStyle/>
+          <a:p>
+            <a:endParaRPr lang="hu-HU"/>
+          </a:p>
+        </p:txBody>
       </p:sp>
       <p:graphicFrame>
         <p:nvGraphicFramePr>
-          <p:cNvPr id="6" name="Chart 1" descr=""/>
+          <p:cNvPr id="6" name="Chart 1"/>
           <p:cNvGraphicFramePr/>
           <p:nvPr/>
         </p:nvGraphicFramePr>
@@ -7513,9 +7613,9 @@
           <a:off x="5669280" y="1143000"/>
           <a:ext cx="2971800" cy="3429000"/>
         </p:xfrm>
-        <a:graphic xmlns:a="http://schemas.openxmlformats.org/drawingml/2006/main">
+        <a:graphic>
           <a:graphicData uri="http://schemas.openxmlformats.org/drawingml/2006/chart">
-            <c:chart xmlns:c="http://schemas.openxmlformats.org/drawingml/2006/chart" r:id="rId2"/>
+            <c:chart xmlns:c="http://schemas.openxmlformats.org/drawingml/2006/chart" xmlns:r="http://schemas.openxmlformats.org/officeDocument/2006/relationships" r:id="rId4"/>
           </a:graphicData>
         </a:graphic>
       </p:graphicFrame>
@@ -7539,7 +7639,7 @@
           </a:prstGeom>
           <a:extLst>
             <a:ext uri="{C572A759-6A51-4108-AA02-DFA0A04FC94B}">
-              <ma14:wrappingTextBoxFlag xmlns:ma14="http://schemas.microsoft.com/office/mac/drawingml/2011/main" val="0"/>
+              <ma14:wrappingTextBoxFlag xmlns:ma14="http://schemas.microsoft.com/office/mac/drawingml/2011/main" xmlns="" val="0"/>
             </a:ext>
           </a:extLst>
         </p:spPr>
@@ -7557,7 +7657,7 @@
           <a:p>
             <a:pPr algn="r"/>
             <a:fld id="{F7021451-1387-4CA6-816F-3879F97B5CBC}" type="slidenum">
-              <a:rPr b="0" lang="en-US"/>
+              <a:rPr lang="en-US" b="0"/>
               <a:t>7</a:t>
             </a:fld>
             <a:endParaRPr lang="en-US"/>
@@ -7592,9 +7692,11 @@
       <p:sp>
         <p:nvSpPr>
           <p:cNvPr id="2" name="Text 0"/>
-          <p:cNvSpPr/>
+          <p:cNvSpPr>
+            <a:spLocks noGrp="1"/>
+          </p:cNvSpPr>
           <p:nvPr>
-            <p:ph idx="100" type="title" hasCustomPrompt="1"/>
+            <p:ph type="title" idx="100" hasCustomPrompt="1"/>
           </p:nvPr>
         </p:nvSpPr>
         <p:spPr>
@@ -7612,7 +7714,7 @@
           <a:bodyPr wrap="square" lIns="0" tIns="0" rIns="0" bIns="0" rtlCol="0" anchor="ctr"/>
           <a:lstStyle/>
           <a:p>
-            <a:pPr algn="l" indent="0" marL="0">
+            <a:pPr marL="0" indent="0" algn="l">
               <a:buNone/>
             </a:pPr>
             <a:r>
@@ -7653,6 +7755,13 @@
             <a:prstDash val="solid"/>
           </a:ln>
         </p:spPr>
+        <p:txBody>
+          <a:bodyPr/>
+          <a:lstStyle/>
+          <a:p>
+            <a:endParaRPr lang="hu-HU"/>
+          </a:p>
+        </p:txBody>
       </p:sp>
       <p:sp>
         <p:nvSpPr>
@@ -7678,17 +7787,24 @@
             <a:prstDash val="solid"/>
           </a:ln>
         </p:spPr>
+        <p:txBody>
+          <a:bodyPr/>
+          <a:lstStyle/>
+          <a:p>
+            <a:endParaRPr lang="hu-HU"/>
+          </a:p>
+        </p:txBody>
       </p:sp>
       <p:pic>
         <p:nvPicPr>
-          <p:cNvPr id="5" name="Image 0" descr="chart">    </p:cNvPr>
+          <p:cNvPr id="5" name="Image 0" descr="chart"/>
           <p:cNvPicPr>
             <a:picLocks noChangeAspect="1"/>
           </p:cNvPicPr>
           <p:nvPr/>
         </p:nvPicPr>
         <p:blipFill>
-          <a:blip r:embed="rId1"/>
+          <a:blip r:embed="rId3"/>
           <a:stretch>
             <a:fillRect/>
           </a:stretch>
@@ -7724,7 +7840,7 @@
           <a:bodyPr wrap="square" lIns="0" tIns="0" rIns="0" bIns="0" rtlCol="0" anchor="ctr"/>
           <a:lstStyle/>
           <a:p>
-            <a:pPr indent="0" marL="0">
+            <a:pPr marL="0" indent="0">
               <a:buNone/>
             </a:pPr>
             <a:r>
@@ -7760,7 +7876,7 @@
           <a:bodyPr wrap="square" lIns="0" tIns="0" rIns="0" bIns="0" rtlCol="0" anchor="ctr"/>
           <a:lstStyle/>
           <a:p>
-            <a:pPr indent="0" marL="0">
+            <a:pPr marL="0" indent="0">
               <a:buNone/>
             </a:pPr>
             <a:r>
@@ -7801,6 +7917,13 @@
             <a:prstDash val="solid"/>
           </a:ln>
         </p:spPr>
+        <p:txBody>
+          <a:bodyPr/>
+          <a:lstStyle/>
+          <a:p>
+            <a:endParaRPr lang="hu-HU"/>
+          </a:p>
+        </p:txBody>
       </p:sp>
       <p:sp>
         <p:nvSpPr>
@@ -7826,17 +7949,24 @@
             <a:prstDash val="solid"/>
           </a:ln>
         </p:spPr>
+        <p:txBody>
+          <a:bodyPr/>
+          <a:lstStyle/>
+          <a:p>
+            <a:endParaRPr lang="hu-HU"/>
+          </a:p>
+        </p:txBody>
       </p:sp>
       <p:pic>
         <p:nvPicPr>
-          <p:cNvPr id="10" name="Image 1" descr="tools">    </p:cNvPr>
+          <p:cNvPr id="10" name="Image 1" descr="tools"/>
           <p:cNvPicPr>
             <a:picLocks noChangeAspect="1"/>
           </p:cNvPicPr>
           <p:nvPr/>
         </p:nvPicPr>
         <p:blipFill>
-          <a:blip r:embed="rId2"/>
+          <a:blip r:embed="rId4"/>
           <a:stretch>
             <a:fillRect/>
           </a:stretch>
@@ -7872,7 +8002,7 @@
           <a:bodyPr wrap="square" lIns="0" tIns="0" rIns="0" bIns="0" rtlCol="0" anchor="ctr"/>
           <a:lstStyle/>
           <a:p>
-            <a:pPr indent="0" marL="0">
+            <a:pPr marL="0" indent="0">
               <a:buNone/>
             </a:pPr>
             <a:r>
@@ -7908,7 +8038,7 @@
           <a:bodyPr wrap="square" lIns="0" tIns="0" rIns="0" bIns="0" rtlCol="0" anchor="ctr"/>
           <a:lstStyle/>
           <a:p>
-            <a:pPr indent="0" marL="0">
+            <a:pPr marL="0" indent="0">
               <a:buNone/>
             </a:pPr>
             <a:r>
@@ -7949,6 +8079,13 @@
             <a:prstDash val="solid"/>
           </a:ln>
         </p:spPr>
+        <p:txBody>
+          <a:bodyPr/>
+          <a:lstStyle/>
+          <a:p>
+            <a:endParaRPr lang="hu-HU"/>
+          </a:p>
+        </p:txBody>
       </p:sp>
       <p:sp>
         <p:nvSpPr>
@@ -7974,17 +8111,24 @@
             <a:prstDash val="solid"/>
           </a:ln>
         </p:spPr>
+        <p:txBody>
+          <a:bodyPr/>
+          <a:lstStyle/>
+          <a:p>
+            <a:endParaRPr lang="hu-HU"/>
+          </a:p>
+        </p:txBody>
       </p:sp>
       <p:pic>
         <p:nvPicPr>
-          <p:cNvPr id="15" name="Image 2" descr="check">    </p:cNvPr>
+          <p:cNvPr id="15" name="Image 2" descr="check"/>
           <p:cNvPicPr>
             <a:picLocks noChangeAspect="1"/>
           </p:cNvPicPr>
           <p:nvPr/>
         </p:nvPicPr>
         <p:blipFill>
-          <a:blip r:embed="rId3"/>
+          <a:blip r:embed="rId5"/>
           <a:stretch>
             <a:fillRect/>
           </a:stretch>
@@ -8020,7 +8164,7 @@
           <a:bodyPr wrap="square" lIns="0" tIns="0" rIns="0" bIns="0" rtlCol="0" anchor="ctr"/>
           <a:lstStyle/>
           <a:p>
-            <a:pPr indent="0" marL="0">
+            <a:pPr marL="0" indent="0">
               <a:buNone/>
             </a:pPr>
             <a:r>
@@ -8056,7 +8200,7 @@
           <a:bodyPr wrap="square" lIns="0" tIns="0" rIns="0" bIns="0" rtlCol="0" anchor="ctr"/>
           <a:lstStyle/>
           <a:p>
-            <a:pPr indent="0" marL="0">
+            <a:pPr marL="0" indent="0">
               <a:buNone/>
             </a:pPr>
             <a:r>
@@ -8097,6 +8241,13 @@
             <a:prstDash val="solid"/>
           </a:ln>
         </p:spPr>
+        <p:txBody>
+          <a:bodyPr/>
+          <a:lstStyle/>
+          <a:p>
+            <a:endParaRPr lang="hu-HU"/>
+          </a:p>
+        </p:txBody>
       </p:sp>
       <p:sp>
         <p:nvSpPr>
@@ -8122,17 +8273,24 @@
             <a:prstDash val="solid"/>
           </a:ln>
         </p:spPr>
+        <p:txBody>
+          <a:bodyPr/>
+          <a:lstStyle/>
+          <a:p>
+            <a:endParaRPr lang="hu-HU"/>
+          </a:p>
+        </p:txBody>
       </p:sp>
       <p:pic>
         <p:nvPicPr>
-          <p:cNvPr id="20" name="Image 3" descr="star">    </p:cNvPr>
+          <p:cNvPr id="20" name="Image 3" descr="star"/>
           <p:cNvPicPr>
             <a:picLocks noChangeAspect="1"/>
           </p:cNvPicPr>
           <p:nvPr/>
         </p:nvPicPr>
         <p:blipFill>
-          <a:blip r:embed="rId4"/>
+          <a:blip r:embed="rId6"/>
           <a:stretch>
             <a:fillRect/>
           </a:stretch>
@@ -8168,7 +8326,7 @@
           <a:bodyPr wrap="square" lIns="0" tIns="0" rIns="0" bIns="0" rtlCol="0" anchor="ctr"/>
           <a:lstStyle/>
           <a:p>
-            <a:pPr indent="0" marL="0">
+            <a:pPr marL="0" indent="0">
               <a:buNone/>
             </a:pPr>
             <a:r>
@@ -8204,7 +8362,7 @@
           <a:bodyPr wrap="square" lIns="0" tIns="0" rIns="0" bIns="0" rtlCol="0" anchor="ctr"/>
           <a:lstStyle/>
           <a:p>
-            <a:pPr indent="0" marL="0">
+            <a:pPr marL="0" indent="0">
               <a:buNone/>
             </a:pPr>
             <a:r>
@@ -8240,7 +8398,7 @@
           <a:bodyPr wrap="square" lIns="0" tIns="0" rIns="0" bIns="0" rtlCol="0" anchor="t"/>
           <a:lstStyle/>
           <a:p>
-            <a:pPr indent="0" marL="0">
+            <a:pPr marL="0" indent="0">
               <a:buNone/>
             </a:pPr>
             <a:r>
@@ -8275,7 +8433,7 @@
           </a:prstGeom>
           <a:extLst>
             <a:ext uri="{C572A759-6A51-4108-AA02-DFA0A04FC94B}">
-              <ma14:wrappingTextBoxFlag xmlns:ma14="http://schemas.microsoft.com/office/mac/drawingml/2011/main" val="0"/>
+              <ma14:wrappingTextBoxFlag xmlns:ma14="http://schemas.microsoft.com/office/mac/drawingml/2011/main" xmlns="" val="0"/>
             </a:ext>
           </a:extLst>
         </p:spPr>
@@ -8293,7 +8451,7 @@
           <a:p>
             <a:pPr algn="r"/>
             <a:fld id="{F7021451-1387-4CA6-816F-3879F97B5CBC}" type="slidenum">
-              <a:rPr b="0" lang="en-US"/>
+              <a:rPr lang="en-US" b="0"/>
               <a:t>8</a:t>
             </a:fld>
             <a:endParaRPr lang="en-US"/>
@@ -8328,9 +8486,11 @@
       <p:sp>
         <p:nvSpPr>
           <p:cNvPr id="2" name="Text 0"/>
-          <p:cNvSpPr/>
+          <p:cNvSpPr>
+            <a:spLocks noGrp="1"/>
+          </p:cNvSpPr>
           <p:nvPr>
-            <p:ph idx="100" type="title" hasCustomPrompt="1"/>
+            <p:ph type="title" idx="100" hasCustomPrompt="1"/>
           </p:nvPr>
         </p:nvSpPr>
         <p:spPr>
@@ -8348,7 +8508,7 @@
           <a:bodyPr wrap="square" lIns="0" tIns="0" rIns="0" bIns="0" rtlCol="0" anchor="ctr"/>
           <a:lstStyle/>
           <a:p>
-            <a:pPr algn="l" indent="0" marL="0">
+            <a:pPr marL="0" indent="0" algn="l">
               <a:buNone/>
             </a:pPr>
             <a:r>
@@ -8389,13 +8549,20 @@
             <a:prstDash val="solid"/>
           </a:ln>
           <a:effectLst>
-            <a:outerShdw sx="100000" sy="100000" kx="0" ky="0" algn="bl" rotWithShape="0" blurRad="101600" dist="25400" dir="5400000">
+            <a:outerShdw blurRad="101600" dist="25400" dir="5400000" algn="bl" rotWithShape="0">
               <a:srgbClr val="000000">
                 <a:alpha val="12000"/>
               </a:srgbClr>
             </a:outerShdw>
           </a:effectLst>
         </p:spPr>
+        <p:txBody>
+          <a:bodyPr/>
+          <a:lstStyle/>
+          <a:p>
+            <a:endParaRPr lang="hu-HU"/>
+          </a:p>
+        </p:txBody>
       </p:sp>
       <p:sp>
         <p:nvSpPr>
@@ -8421,17 +8588,24 @@
             <a:prstDash val="solid"/>
           </a:ln>
         </p:spPr>
+        <p:txBody>
+          <a:bodyPr/>
+          <a:lstStyle/>
+          <a:p>
+            <a:endParaRPr lang="hu-HU"/>
+          </a:p>
+        </p:txBody>
       </p:sp>
       <p:pic>
         <p:nvPicPr>
-          <p:cNvPr id="5" name="Image 0" descr="mobile">    </p:cNvPr>
+          <p:cNvPr id="5" name="Image 0" descr="mobile"/>
           <p:cNvPicPr>
             <a:picLocks noChangeAspect="1"/>
           </p:cNvPicPr>
           <p:nvPr/>
         </p:nvPicPr>
         <p:blipFill>
-          <a:blip r:embed="rId1"/>
+          <a:blip r:embed="rId3"/>
           <a:stretch>
             <a:fillRect/>
           </a:stretch>
@@ -8467,7 +8641,7 @@
           <a:bodyPr wrap="square" lIns="0" tIns="0" rIns="0" bIns="0" rtlCol="0" anchor="ctr"/>
           <a:lstStyle/>
           <a:p>
-            <a:pPr indent="0" marL="0">
+            <a:pPr marL="0" indent="0">
               <a:buNone/>
             </a:pPr>
             <a:r>
@@ -8503,7 +8677,7 @@
           <a:bodyPr wrap="square" lIns="0" tIns="0" rIns="0" bIns="0" rtlCol="0" anchor="t"/>
           <a:lstStyle/>
           <a:p>
-            <a:pPr indent="0" marL="0">
+            <a:pPr marL="0" indent="0">
               <a:buNone/>
             </a:pPr>
             <a:r>
@@ -8512,7 +8686,39 @@
                   <a:srgbClr val="475569"/>
                 </a:solidFill>
               </a:rPr>
-              <a:t>Egyoldalas oldal: szolgáltatások, árak, kapcsolat – és minden projektdokumentum egy helyen.</a:t>
+              <a:t>Egyoldalas oldal: szolgáltatások, árak, </a:t>
+            </a:r>
+            <a:r>
+              <a:rPr lang="en-US" sz="1400" dirty="0" err="1">
+                <a:solidFill>
+                  <a:srgbClr val="475569"/>
+                </a:solidFill>
+              </a:rPr>
+              <a:t>kapcsolat</a:t>
+            </a:r>
+            <a:r>
+              <a:rPr lang="en-US" sz="1400" dirty="0">
+                <a:solidFill>
+                  <a:srgbClr val="475569"/>
+                </a:solidFill>
+              </a:rPr>
+              <a:t> </a:t>
+            </a:r>
+            <a:r>
+              <a:rPr lang="en-US" sz="1400" dirty="0" err="1">
+                <a:solidFill>
+                  <a:srgbClr val="475569"/>
+                </a:solidFill>
+              </a:rPr>
+              <a:t>és</a:t>
+            </a:r>
+            <a:r>
+              <a:rPr lang="en-US" sz="1400" dirty="0">
+                <a:solidFill>
+                  <a:srgbClr val="475569"/>
+                </a:solidFill>
+              </a:rPr>
+              <a:t> minden projektdokumentum egy helyen.</a:t>
             </a:r>
             <a:endParaRPr lang="en-US" sz="1400" dirty="0"/>
           </a:p>
@@ -8544,13 +8750,20 @@
             <a:prstDash val="solid"/>
           </a:ln>
           <a:effectLst>
-            <a:outerShdw sx="100000" sy="100000" kx="0" ky="0" algn="bl" rotWithShape="0" blurRad="101600" dist="25400" dir="5400000">
+            <a:outerShdw blurRad="101600" dist="25400" dir="5400000" algn="bl" rotWithShape="0">
               <a:srgbClr val="000000">
                 <a:alpha val="12000"/>
               </a:srgbClr>
             </a:outerShdw>
           </a:effectLst>
         </p:spPr>
+        <p:txBody>
+          <a:bodyPr/>
+          <a:lstStyle/>
+          <a:p>
+            <a:endParaRPr lang="hu-HU"/>
+          </a:p>
+        </p:txBody>
       </p:sp>
       <p:sp>
         <p:nvSpPr>
@@ -8576,17 +8789,24 @@
             <a:prstDash val="solid"/>
           </a:ln>
         </p:spPr>
+        <p:txBody>
+          <a:bodyPr/>
+          <a:lstStyle/>
+          <a:p>
+            <a:endParaRPr lang="hu-HU"/>
+          </a:p>
+        </p:txBody>
       </p:sp>
       <p:pic>
         <p:nvPicPr>
-          <p:cNvPr id="10" name="Image 1" descr="form">    </p:cNvPr>
+          <p:cNvPr id="10" name="Image 1" descr="form"/>
           <p:cNvPicPr>
             <a:picLocks noChangeAspect="1"/>
           </p:cNvPicPr>
           <p:nvPr/>
         </p:nvPicPr>
         <p:blipFill>
-          <a:blip r:embed="rId2"/>
+          <a:blip r:embed="rId4"/>
           <a:stretch>
             <a:fillRect/>
           </a:stretch>
@@ -8622,7 +8842,7 @@
           <a:bodyPr wrap="square" lIns="0" tIns="0" rIns="0" bIns="0" rtlCol="0" anchor="ctr"/>
           <a:lstStyle/>
           <a:p>
-            <a:pPr indent="0" marL="0">
+            <a:pPr marL="0" indent="0">
               <a:buNone/>
             </a:pPr>
             <a:r>
@@ -8658,7 +8878,7 @@
           <a:bodyPr wrap="square" lIns="0" tIns="0" rIns="0" bIns="0" rtlCol="0" anchor="t"/>
           <a:lstStyle/>
           <a:p>
-            <a:pPr indent="0" marL="0">
+            <a:pPr marL="0" indent="0">
               <a:buNone/>
             </a:pPr>
             <a:r>
@@ -8667,7 +8887,23 @@
                   <a:srgbClr val="475569"/>
                 </a:solidFill>
               </a:rPr>
-              <a:t>Online űrlap (6 kérdés), amellyel az ügyfelek értékelhetik a szolgáltatást.</a:t>
+              <a:t>Online </a:t>
+            </a:r>
+            <a:r>
+              <a:rPr lang="en-US" sz="1400" dirty="0" err="1">
+                <a:solidFill>
+                  <a:srgbClr val="475569"/>
+                </a:solidFill>
+              </a:rPr>
+              <a:t>űrlap</a:t>
+            </a:r>
+            <a:r>
+              <a:rPr lang="en-US" sz="1400" dirty="0">
+                <a:solidFill>
+                  <a:srgbClr val="475569"/>
+                </a:solidFill>
+              </a:rPr>
+              <a:t>, amellyel az ügyfelek értékelhetik a szolgáltatást.</a:t>
             </a:r>
             <a:endParaRPr lang="en-US" sz="1400" dirty="0"/>
           </a:p>
@@ -8699,13 +8935,20 @@
             <a:prstDash val="solid"/>
           </a:ln>
           <a:effectLst>
-            <a:outerShdw sx="100000" sy="100000" kx="0" ky="0" algn="bl" rotWithShape="0" blurRad="101600" dist="25400" dir="5400000">
+            <a:outerShdw blurRad="101600" dist="25400" dir="5400000" algn="bl" rotWithShape="0">
               <a:srgbClr val="000000">
                 <a:alpha val="12000"/>
               </a:srgbClr>
             </a:outerShdw>
           </a:effectLst>
         </p:spPr>
+        <p:txBody>
+          <a:bodyPr/>
+          <a:lstStyle/>
+          <a:p>
+            <a:endParaRPr lang="hu-HU"/>
+          </a:p>
+        </p:txBody>
       </p:sp>
       <p:sp>
         <p:nvSpPr>
@@ -8731,17 +8974,24 @@
             <a:prstDash val="solid"/>
           </a:ln>
         </p:spPr>
+        <p:txBody>
+          <a:bodyPr/>
+          <a:lstStyle/>
+          <a:p>
+            <a:endParaRPr lang="hu-HU"/>
+          </a:p>
+        </p:txBody>
       </p:sp>
       <p:pic>
         <p:nvPicPr>
-          <p:cNvPr id="15" name="Image 2" descr="chart">    </p:cNvPr>
+          <p:cNvPr id="15" name="Image 2" descr="chart"/>
           <p:cNvPicPr>
             <a:picLocks noChangeAspect="1"/>
           </p:cNvPicPr>
           <p:nvPr/>
         </p:nvPicPr>
         <p:blipFill>
-          <a:blip r:embed="rId3"/>
+          <a:blip r:embed="rId5"/>
           <a:stretch>
             <a:fillRect/>
           </a:stretch>
@@ -8777,7 +9027,7 @@
           <a:bodyPr wrap="square" lIns="0" tIns="0" rIns="0" bIns="0" rtlCol="0" anchor="ctr"/>
           <a:lstStyle/>
           <a:p>
-            <a:pPr indent="0" marL="0">
+            <a:pPr marL="0" indent="0">
               <a:buNone/>
             </a:pPr>
             <a:r>
@@ -8813,16 +9063,40 @@
           <a:bodyPr wrap="square" lIns="0" tIns="0" rIns="0" bIns="0" rtlCol="0" anchor="t"/>
           <a:lstStyle/>
           <a:p>
-            <a:pPr indent="0" marL="0">
+            <a:pPr marL="0" indent="0">
               <a:buNone/>
             </a:pPr>
             <a:r>
+              <a:rPr lang="en-US" sz="1400" dirty="0" err="1">
+                <a:solidFill>
+                  <a:srgbClr val="475569"/>
+                </a:solidFill>
+              </a:rPr>
+              <a:t>Cégbemutató</a:t>
+            </a:r>
+            <a:r>
               <a:rPr lang="en-US" sz="1400" dirty="0">
                 <a:solidFill>
                   <a:srgbClr val="475569"/>
                 </a:solidFill>
               </a:rPr>
-              <a:t>Cégbemutató (Word), forgalmi munkafüzet (Excel), PPT és projekt alapító dokumentum.</a:t>
+              <a:t>, forgalmi </a:t>
+            </a:r>
+            <a:r>
+              <a:rPr lang="en-US" sz="1400" dirty="0" err="1">
+                <a:solidFill>
+                  <a:srgbClr val="475569"/>
+                </a:solidFill>
+              </a:rPr>
+              <a:t>munkafüzet</a:t>
+            </a:r>
+            <a:r>
+              <a:rPr lang="en-US" sz="1400" dirty="0">
+                <a:solidFill>
+                  <a:srgbClr val="475569"/>
+                </a:solidFill>
+              </a:rPr>
+              <a:t> , PPT és projekt alapító dokumentum.</a:t>
             </a:r>
             <a:endParaRPr lang="en-US" sz="1400" dirty="0"/>
           </a:p>
@@ -8848,7 +9122,7 @@
           </a:prstGeom>
           <a:extLst>
             <a:ext uri="{C572A759-6A51-4108-AA02-DFA0A04FC94B}">
-              <ma14:wrappingTextBoxFlag xmlns:ma14="http://schemas.microsoft.com/office/mac/drawingml/2011/main" val="0"/>
+              <ma14:wrappingTextBoxFlag xmlns:ma14="http://schemas.microsoft.com/office/mac/drawingml/2011/main" xmlns="" val="0"/>
             </a:ext>
           </a:extLst>
         </p:spPr>
@@ -8866,7 +9140,7 @@
           <a:p>
             <a:pPr algn="r"/>
             <a:fld id="{F7021451-1387-4CA6-816F-3879F97B5CBC}" type="slidenum">
-              <a:rPr b="0" lang="en-US"/>
+              <a:rPr lang="en-US" b="0"/>
               <a:t>9</a:t>
             </a:fld>
             <a:endParaRPr lang="en-US"/>
@@ -9174,4 +9448,319 @@
     </a:ext>
   </a:extLst>
 </a:theme>
+</file>
+
+<file path=ppt/theme/theme2.xml><?xml version="1.0" encoding="utf-8"?>
+<a:theme xmlns:a="http://schemas.openxmlformats.org/drawingml/2006/main" name="Office-téma">
+  <a:themeElements>
+    <a:clrScheme name="Office">
+      <a:dk1>
+        <a:sysClr val="windowText" lastClr="000000"/>
+      </a:dk1>
+      <a:lt1>
+        <a:sysClr val="window" lastClr="FFFFFF"/>
+      </a:lt1>
+      <a:dk2>
+        <a:srgbClr val="0E2841"/>
+      </a:dk2>
+      <a:lt2>
+        <a:srgbClr val="E8E8E8"/>
+      </a:lt2>
+      <a:accent1>
+        <a:srgbClr val="156082"/>
+      </a:accent1>
+      <a:accent2>
+        <a:srgbClr val="E97132"/>
+      </a:accent2>
+      <a:accent3>
+        <a:srgbClr val="196B24"/>
+      </a:accent3>
+      <a:accent4>
+        <a:srgbClr val="0F9ED5"/>
+      </a:accent4>
+      <a:accent5>
+        <a:srgbClr val="A02B93"/>
+      </a:accent5>
+      <a:accent6>
+        <a:srgbClr val="4EA72E"/>
+      </a:accent6>
+      <a:hlink>
+        <a:srgbClr val="467886"/>
+      </a:hlink>
+      <a:folHlink>
+        <a:srgbClr val="96607D"/>
+      </a:folHlink>
+    </a:clrScheme>
+    <a:fontScheme name="Office">
+      <a:majorFont>
+        <a:latin typeface="Aptos Display" panose="02110004020202020204"/>
+        <a:ea typeface=""/>
+        <a:cs typeface=""/>
+        <a:font script="Jpan" typeface="游ゴシック Light"/>
+        <a:font script="Hang" typeface="맑은 고딕"/>
+        <a:font script="Hans" typeface="等线 Light"/>
+        <a:font script="Hant" typeface="新細明體"/>
+        <a:font script="Arab" typeface="Times New Roman"/>
+        <a:font script="Hebr" typeface="Times New Roman"/>
+        <a:font script="Thai" typeface="Angsana New"/>
+        <a:font script="Ethi" typeface="Nyala"/>
+        <a:font script="Beng" typeface="Vrinda"/>
+        <a:font script="Gujr" typeface="Shruti"/>
+        <a:font script="Khmr" typeface="MoolBoran"/>
+        <a:font script="Knda" typeface="Tunga"/>
+        <a:font script="Guru" typeface="Raavi"/>
+        <a:font script="Cans" typeface="Euphemia"/>
+        <a:font script="Cher" typeface="Plantagenet Cherokee"/>
+        <a:font script="Yiii" typeface="Microsoft Yi Baiti"/>
+        <a:font script="Tibt" typeface="Microsoft Himalaya"/>
+        <a:font script="Thaa" typeface="MV Boli"/>
+        <a:font script="Deva" typeface="Mangal"/>
+        <a:font script="Telu" typeface="Gautami"/>
+        <a:font script="Taml" typeface="Latha"/>
+        <a:font script="Syrc" typeface="Estrangelo Edessa"/>
+        <a:font script="Orya" typeface="Kalinga"/>
+        <a:font script="Mlym" typeface="Kartika"/>
+        <a:font script="Laoo" typeface="DokChampa"/>
+        <a:font script="Sinh" typeface="Iskoola Pota"/>
+        <a:font script="Mong" typeface="Mongolian Baiti"/>
+        <a:font script="Viet" typeface="Times New Roman"/>
+        <a:font script="Uigh" typeface="Microsoft Uighur"/>
+        <a:font script="Geor" typeface="Sylfaen"/>
+        <a:font script="Armn" typeface="Arial"/>
+        <a:font script="Bugi" typeface="Leelawadee UI"/>
+        <a:font script="Bopo" typeface="Microsoft JhengHei"/>
+        <a:font script="Java" typeface="Javanese Text"/>
+        <a:font script="Lisu" typeface="Segoe UI"/>
+        <a:font script="Mymr" typeface="Myanmar Text"/>
+        <a:font script="Nkoo" typeface="Ebrima"/>
+        <a:font script="Olck" typeface="Nirmala UI"/>
+        <a:font script="Osma" typeface="Ebrima"/>
+        <a:font script="Phag" typeface="Phagspa"/>
+        <a:font script="Syrn" typeface="Estrangelo Edessa"/>
+        <a:font script="Syrj" typeface="Estrangelo Edessa"/>
+        <a:font script="Syre" typeface="Estrangelo Edessa"/>
+        <a:font script="Sora" typeface="Nirmala UI"/>
+        <a:font script="Tale" typeface="Microsoft Tai Le"/>
+        <a:font script="Talu" typeface="Microsoft New Tai Lue"/>
+        <a:font script="Tfng" typeface="Ebrima"/>
+      </a:majorFont>
+      <a:minorFont>
+        <a:latin typeface="Aptos" panose="02110004020202020204"/>
+        <a:ea typeface=""/>
+        <a:cs typeface=""/>
+        <a:font script="Jpan" typeface="游ゴシック"/>
+        <a:font script="Hang" typeface="맑은 고딕"/>
+        <a:font script="Hans" typeface="等线"/>
+        <a:font script="Hant" typeface="新細明體"/>
+        <a:font script="Arab" typeface="Arial"/>
+        <a:font script="Hebr" typeface="Arial"/>
+        <a:font script="Thai" typeface="Cordia New"/>
+        <a:font script="Ethi" typeface="Nyala"/>
+        <a:font script="Beng" typeface="Vrinda"/>
+        <a:font script="Gujr" typeface="Shruti"/>
+        <a:font script="Khmr" typeface="DaunPenh"/>
+        <a:font script="Knda" typeface="Tunga"/>
+        <a:font script="Guru" typeface="Raavi"/>
+        <a:font script="Cans" typeface="Euphemia"/>
+        <a:font script="Cher" typeface="Plantagenet Cherokee"/>
+        <a:font script="Yiii" typeface="Microsoft Yi Baiti"/>
+        <a:font script="Tibt" typeface="Microsoft Himalaya"/>
+        <a:font script="Thaa" typeface="MV Boli"/>
+        <a:font script="Deva" typeface="Mangal"/>
+        <a:font script="Telu" typeface="Gautami"/>
+        <a:font script="Taml" typeface="Latha"/>
+        <a:font script="Syrc" typeface="Estrangelo Edessa"/>
+        <a:font script="Orya" typeface="Kalinga"/>
+        <a:font script="Mlym" typeface="Kartika"/>
+        <a:font script="Laoo" typeface="DokChampa"/>
+        <a:font script="Sinh" typeface="Iskoola Pota"/>
+        <a:font script="Mong" typeface="Mongolian Baiti"/>
+        <a:font script="Viet" typeface="Arial"/>
+        <a:font script="Uigh" typeface="Microsoft Uighur"/>
+        <a:font script="Geor" typeface="Sylfaen"/>
+        <a:font script="Armn" typeface="Arial"/>
+        <a:font script="Bugi" typeface="Leelawadee UI"/>
+        <a:font script="Bopo" typeface="Microsoft JhengHei"/>
+        <a:font script="Java" typeface="Javanese Text"/>
+        <a:font script="Lisu" typeface="Segoe UI"/>
+        <a:font script="Mymr" typeface="Myanmar Text"/>
+        <a:font script="Nkoo" typeface="Ebrima"/>
+        <a:font script="Olck" typeface="Nirmala UI"/>
+        <a:font script="Osma" typeface="Ebrima"/>
+        <a:font script="Phag" typeface="Phagspa"/>
+        <a:font script="Syrn" typeface="Estrangelo Edessa"/>
+        <a:font script="Syrj" typeface="Estrangelo Edessa"/>
+        <a:font script="Syre" typeface="Estrangelo Edessa"/>
+        <a:font script="Sora" typeface="Nirmala UI"/>
+        <a:font script="Tale" typeface="Microsoft Tai Le"/>
+        <a:font script="Talu" typeface="Microsoft New Tai Lue"/>
+        <a:font script="Tfng" typeface="Ebrima"/>
+      </a:minorFont>
+    </a:fontScheme>
+    <a:fmtScheme name="Office">
+      <a:fillStyleLst>
+        <a:solidFill>
+          <a:schemeClr val="phClr"/>
+        </a:solidFill>
+        <a:gradFill rotWithShape="1">
+          <a:gsLst>
+            <a:gs pos="0">
+              <a:schemeClr val="phClr">
+                <a:lumMod val="110000"/>
+                <a:satMod val="105000"/>
+                <a:tint val="67000"/>
+              </a:schemeClr>
+            </a:gs>
+            <a:gs pos="50000">
+              <a:schemeClr val="phClr">
+                <a:lumMod val="105000"/>
+                <a:satMod val="103000"/>
+                <a:tint val="73000"/>
+              </a:schemeClr>
+            </a:gs>
+            <a:gs pos="100000">
+              <a:schemeClr val="phClr">
+                <a:lumMod val="105000"/>
+                <a:satMod val="109000"/>
+                <a:tint val="81000"/>
+              </a:schemeClr>
+            </a:gs>
+          </a:gsLst>
+          <a:lin ang="5400000" scaled="0"/>
+        </a:gradFill>
+        <a:gradFill rotWithShape="1">
+          <a:gsLst>
+            <a:gs pos="0">
+              <a:schemeClr val="phClr">
+                <a:satMod val="103000"/>
+                <a:lumMod val="102000"/>
+                <a:tint val="94000"/>
+              </a:schemeClr>
+            </a:gs>
+            <a:gs pos="50000">
+              <a:schemeClr val="phClr">
+                <a:satMod val="110000"/>
+                <a:lumMod val="100000"/>
+                <a:shade val="100000"/>
+              </a:schemeClr>
+            </a:gs>
+            <a:gs pos="100000">
+              <a:schemeClr val="phClr">
+                <a:lumMod val="99000"/>
+                <a:satMod val="120000"/>
+                <a:shade val="78000"/>
+              </a:schemeClr>
+            </a:gs>
+          </a:gsLst>
+          <a:lin ang="5400000" scaled="0"/>
+        </a:gradFill>
+      </a:fillStyleLst>
+      <a:lnStyleLst>
+        <a:ln w="12700" cap="flat" cmpd="sng" algn="ctr">
+          <a:solidFill>
+            <a:schemeClr val="phClr"/>
+          </a:solidFill>
+          <a:prstDash val="solid"/>
+          <a:miter lim="800000"/>
+        </a:ln>
+        <a:ln w="19050" cap="flat" cmpd="sng" algn="ctr">
+          <a:solidFill>
+            <a:schemeClr val="phClr"/>
+          </a:solidFill>
+          <a:prstDash val="solid"/>
+          <a:miter lim="800000"/>
+        </a:ln>
+        <a:ln w="25400" cap="flat" cmpd="sng" algn="ctr">
+          <a:solidFill>
+            <a:schemeClr val="phClr"/>
+          </a:solidFill>
+          <a:prstDash val="solid"/>
+          <a:miter lim="800000"/>
+        </a:ln>
+      </a:lnStyleLst>
+      <a:effectStyleLst>
+        <a:effectStyle>
+          <a:effectLst/>
+        </a:effectStyle>
+        <a:effectStyle>
+          <a:effectLst/>
+        </a:effectStyle>
+        <a:effectStyle>
+          <a:effectLst>
+            <a:outerShdw blurRad="57150" dist="19050" dir="5400000" algn="ctr" rotWithShape="0">
+              <a:srgbClr val="000000">
+                <a:alpha val="63000"/>
+              </a:srgbClr>
+            </a:outerShdw>
+          </a:effectLst>
+        </a:effectStyle>
+      </a:effectStyleLst>
+      <a:bgFillStyleLst>
+        <a:solidFill>
+          <a:schemeClr val="phClr"/>
+        </a:solidFill>
+        <a:solidFill>
+          <a:schemeClr val="phClr">
+            <a:tint val="95000"/>
+            <a:satMod val="170000"/>
+          </a:schemeClr>
+        </a:solidFill>
+        <a:gradFill rotWithShape="1">
+          <a:gsLst>
+            <a:gs pos="0">
+              <a:schemeClr val="phClr">
+                <a:tint val="93000"/>
+                <a:satMod val="150000"/>
+                <a:shade val="98000"/>
+                <a:lumMod val="102000"/>
+              </a:schemeClr>
+            </a:gs>
+            <a:gs pos="50000">
+              <a:schemeClr val="phClr">
+                <a:tint val="98000"/>
+                <a:satMod val="130000"/>
+                <a:shade val="90000"/>
+                <a:lumMod val="103000"/>
+              </a:schemeClr>
+            </a:gs>
+            <a:gs pos="100000">
+              <a:schemeClr val="phClr">
+                <a:shade val="63000"/>
+                <a:satMod val="120000"/>
+              </a:schemeClr>
+            </a:gs>
+          </a:gsLst>
+          <a:lin ang="5400000" scaled="0"/>
+        </a:gradFill>
+      </a:bgFillStyleLst>
+    </a:fmtScheme>
+  </a:themeElements>
+  <a:objectDefaults>
+    <a:lnDef>
+      <a:spPr/>
+      <a:bodyPr/>
+      <a:lstStyle/>
+      <a:style>
+        <a:lnRef idx="2">
+          <a:schemeClr val="accent1"/>
+        </a:lnRef>
+        <a:fillRef idx="0">
+          <a:schemeClr val="accent1"/>
+        </a:fillRef>
+        <a:effectRef idx="1">
+          <a:schemeClr val="accent1"/>
+        </a:effectRef>
+        <a:fontRef idx="minor">
+          <a:schemeClr val="tx1"/>
+        </a:fontRef>
+      </a:style>
+    </a:lnDef>
+  </a:objectDefaults>
+  <a:extraClrSchemeLst/>
+  <a:extLst>
+    <a:ext uri="{05A4C25C-085E-4340-85A3-A5531E510DB2}">
+      <thm15:themeFamily xmlns:thm15="http://schemas.microsoft.com/office/thememl/2012/main" name="Office Theme" id="{2E142A2C-CD16-42D6-873A-C26D2A0506FA}" vid="{1BDDFF52-6CD6-40A5-AB3C-68EB2F1E4D0A}"/>
+    </a:ext>
+  </a:extLst>
+</a:theme>
 </file>